--- a/RNP-Team-for-Technology-Transfer-Skills-and-Headcount.pptx
+++ b/RNP-Team-for-Technology-Transfer-Skills-and-Headcount.pptx
@@ -7,9 +7,10 @@
   <p:sldIdLst>
     <p:sldId id="256" r:id="rId2"/>
     <p:sldId id="257" r:id="rId3"/>
+    <p:sldId id="258" r:id="rId4"/>
   </p:sldIdLst>
   <p:notesMasterIdLst>
-    <p:notesMasterId r:id="rId4"/>
+    <p:notesMasterId r:id="rId5"/>
   </p:notesMasterIdLst>
   <p:sldSz cx="12192000" cy="6858000"/>
   <p:notesSz cx="6858000" cy="12192000"/>
@@ -504,7 +505,7 @@
             <a:r>
               <a:rPr lang="en-US" dirty="0"/>
               <a:t>【内部说明，发送前处理】
-1. 本稿只回答 Iara 9 月 13 日 WhatsApp 的两问：技能、人数。一张表：团队 / 岗位 / 人数 / 必须会做什么。内容按 9 月 9 日英文 PPT 填（第 13 页与附录 A3、A7、A10）。
+1. 本稿只回答 Iara 9 月 13 日 WhatsApp 的两问：技能、人数。第 2 页概览按 9 月 9 日 PPT 第 13 页的三批次布局，第 3 页岗位画像一张表。内容按 PPT 第 13 页与附录 A3、A7、A10 填。
 2. 人数口径要二选一：PPT 第 13 页写三批约 30 / 20 / 30 人，附录 A7 按岗位合计 53 / 25 / 33 人、总计 111。本稿按 A7 明细填。第 2 页右上角黄色标签是提醒，定稿后删除。
 3. 发送前导出 PDF；备注不会进入 PDF。</a:t>
             </a:r>
@@ -618,6 +619,94 @@
             <a:fld id="{F7021451-1387-4CA6-816F-3879F97B5CBC}" type="slidenum">
               <a:rPr lang="en-US"/>
               <a:t>2</a:t>
+            </a:fld>
+            <a:endParaRPr lang="en-US"/>
+          </a:p>
+        </p:txBody>
+      </p:sp>
+    </p:spTree>
+    <p:extLst>
+      <p:ext uri="{BB962C8B-B14F-4D97-AF65-F5344CB8AC3E}">
+        <p14:creationId xmlns:p14="http://schemas.microsoft.com/office/powerpoint/2010/main" val="1024086991"/>
+      </p:ext>
+    </p:extLst>
+  </p:cSld>
+  <p:clrMapOvr>
+    <a:masterClrMapping/>
+  </p:clrMapOvr>
+</p:notes>
+</file>
+
+<file path=ppt/notesSlides/notesSlide3.xml><?xml version="1.0" encoding="utf-8"?>
+<p:notes xmlns:a="http://schemas.openxmlformats.org/drawingml/2006/main" xmlns:r="http://schemas.openxmlformats.org/officeDocument/2006/relationships" xmlns:p="http://schemas.openxmlformats.org/presentationml/2006/main">
+  <p:cSld>
+    <p:spTree>
+      <p:nvGrpSpPr>
+        <p:cNvPr id="1" name=""/>
+        <p:cNvGrpSpPr/>
+        <p:nvPr/>
+      </p:nvGrpSpPr>
+      <p:grpSpPr>
+        <a:xfrm>
+          <a:off x="0" y="0"/>
+          <a:ext cx="0" cy="0"/>
+          <a:chOff x="0" y="0"/>
+          <a:chExt cx="0" cy="0"/>
+        </a:xfrm>
+      </p:grpSpPr>
+      <p:sp>
+        <p:nvSpPr>
+          <p:cNvPr id="2" name="Slide Image Placeholder 1"/>
+          <p:cNvSpPr>
+            <a:spLocks noGrp="1" noRot="1" noChangeAspect="1"/>
+          </p:cNvSpPr>
+          <p:nvPr>
+            <p:ph type="sldImg"/>
+          </p:nvPr>
+        </p:nvSpPr>
+        <p:spPr/>
+      </p:sp>
+      <p:sp>
+        <p:nvSpPr>
+          <p:cNvPr id="3" name="Notes Placeholder 2"/>
+          <p:cNvSpPr>
+            <a:spLocks noGrp="1"/>
+          </p:cNvSpPr>
+          <p:nvPr>
+            <p:ph type="body" idx="1"/>
+          </p:nvPr>
+        </p:nvSpPr>
+        <p:spPr/>
+        <p:txBody>
+          <a:bodyPr/>
+          <a:lstStyle/>
+          <a:p>
+            <a:r>
+              <a:rPr lang="en-US" dirty="0"/>
+              <a:t/>
+            </a:r>
+            <a:endParaRPr lang="en-US" dirty="0"/>
+          </a:p>
+        </p:txBody>
+      </p:sp>
+      <p:sp>
+        <p:nvSpPr>
+          <p:cNvPr id="4" name="Slide Number Placeholder 3"/>
+          <p:cNvSpPr>
+            <a:spLocks noGrp="1"/>
+          </p:cNvSpPr>
+          <p:nvPr>
+            <p:ph type="sldNum" sz="quarter" idx="10"/>
+          </p:nvPr>
+        </p:nvSpPr>
+        <p:spPr/>
+        <p:txBody>
+          <a:bodyPr/>
+          <a:lstStyle/>
+          <a:p>
+            <a:fld id="{F7021451-1387-4CA6-816F-3879F97B5CBC}" type="slidenum">
+              <a:rPr lang="en-US"/>
+              <a:t>3</a:t>
             </a:fld>
             <a:endParaRPr lang="en-US"/>
           </a:p>
@@ -1071,7 +1160,7 @@
                 <a:ea typeface="Calibri" pitchFamily="34" charset="-122"/>
                 <a:cs typeface="Calibri" pitchFamily="34" charset="-120"/>
               </a:rPr>
-              <a:t>The roles RNP needs on its side, what each must be able to do, and how many people</a:t>
+              <a:t>The teams and roles RNP needs on its side, how each works with iFLYTEK, and how many people</a:t>
             </a:r>
             <a:endParaRPr lang="en-US" sz="1500" dirty="0"/>
           </a:p>
@@ -1281,11 +1370,11 @@
             </a:avLst>
           </a:prstGeom>
           <a:solidFill>
-            <a:srgbClr val="C00000"/>
+            <a:srgbClr val="E8F0FA"/>
           </a:solidFill>
           <a:ln w="12700">
             <a:solidFill>
-              <a:srgbClr val="C00000"/>
+              <a:srgbClr val="E8F0FA"/>
             </a:solidFill>
             <a:prstDash val="solid"/>
           </a:ln>
@@ -1318,13 +1407,79 @@
             <a:r>
               <a:rPr lang="en-US" sz="1050" b="1" dirty="0">
                 <a:solidFill>
+                  <a:srgbClr val="1F4E79"/>
+                </a:solidFill>
+                <a:latin typeface="Calibri" pitchFamily="34" charset="0"/>
+                <a:ea typeface="Calibri" pitchFamily="34" charset="-122"/>
+                <a:cs typeface="Calibri" pitchFamily="34" charset="-120"/>
+              </a:rPr>
+              <a:t>Overview  ·  8 teams, 111 people at peak</a:t>
+            </a:r>
+            <a:endParaRPr lang="en-US" sz="1050" dirty="0"/>
+          </a:p>
+        </p:txBody>
+      </p:sp>
+      <p:sp>
+        <p:nvSpPr>
+          <p:cNvPr id="11" name="Shape 9"/>
+          <p:cNvSpPr/>
+          <p:nvPr/>
+        </p:nvSpPr>
+        <p:spPr>
+          <a:xfrm>
+            <a:off x="9052560" y="4361688"/>
+            <a:ext cx="2651760" cy="658368"/>
+          </a:xfrm>
+          <a:prstGeom prst="roundRect">
+            <a:avLst>
+              <a:gd name="adj" fmla="val 8333"/>
+            </a:avLst>
+          </a:prstGeom>
+          <a:solidFill>
+            <a:srgbClr val="C00000"/>
+          </a:solidFill>
+          <a:ln w="12700">
+            <a:solidFill>
+              <a:srgbClr val="C00000"/>
+            </a:solidFill>
+            <a:prstDash val="solid"/>
+          </a:ln>
+        </p:spPr>
+      </p:sp>
+      <p:sp>
+        <p:nvSpPr>
+          <p:cNvPr id="12" name="Text 10"/>
+          <p:cNvSpPr txBox="1"/>
+          <p:nvPr/>
+        </p:nvSpPr>
+        <p:spPr>
+          <a:xfrm>
+            <a:off x="9281160" y="4361688"/>
+            <a:ext cx="2377440" cy="658368"/>
+          </a:xfrm>
+          <a:prstGeom prst="rect">
+            <a:avLst/>
+          </a:prstGeom>
+          <a:noFill/>
+          <a:ln/>
+        </p:spPr>
+        <p:txBody>
+          <a:bodyPr wrap="square" lIns="0" tIns="0" rIns="0" bIns="0" rtlCol="0" anchor="ctr"/>
+          <a:lstStyle/>
+          <a:p>
+            <a:pPr indent="0" marL="0">
+              <a:buNone/>
+            </a:pPr>
+            <a:r>
+              <a:rPr lang="en-US" sz="1050" b="1" dirty="0">
+                <a:solidFill>
                   <a:srgbClr val="FFFFFF"/>
                 </a:solidFill>
                 <a:latin typeface="Calibri" pitchFamily="34" charset="0"/>
                 <a:ea typeface="Calibri" pitchFamily="34" charset="-122"/>
                 <a:cs typeface="Calibri" pitchFamily="34" charset="-120"/>
               </a:rPr>
-              <a:t>One table: 8 teams, 19 roles, 111 people at peak</a:t>
+              <a:t>Role profiles  ·  19 roles, how each works with iFLYTEK</a:t>
             </a:r>
             <a:endParaRPr lang="en-US" sz="1050" dirty="0"/>
           </a:p>
@@ -1388,7 +1543,7 @@
                 <a:ea typeface="Calibri" pitchFamily="34" charset="-122"/>
                 <a:cs typeface="Calibri" pitchFamily="34" charset="-120"/>
               </a:rPr>
-              <a:t>RNP team for the technology transfer: 8 teams, 19 roles, 111 people at peak</a:t>
+              <a:t>The RNP team at a glance: 8 teams in 3 intakes, 111 people at peak</a:t>
             </a:r>
             <a:endParaRPr lang="en-US" sz="1800" dirty="0"/>
           </a:p>
@@ -1427,7 +1582,7 @@
                 <a:ea typeface="Calibri" pitchFamily="34" charset="-122"/>
                 <a:cs typeface="Calibri" pitchFamily="34" charset="-120"/>
               </a:rPr>
-              <a:t>What each role must be able to do, and how many people. Headcounts are peaks per function, reusable across activities, not people on site at once. Source: presentation of 9 September, p.13 and Appendices A3, A7, A10.</a:t>
+              <a:t>Teams grouped as in the presentation of 9 September (p.13). Headcounts are peaks per function, reusable across activities, not people on site at once. Source: p.13 and Appendix A7.</a:t>
             </a:r>
             <a:endParaRPr lang="en-US" sz="1050" dirty="0"/>
           </a:p>
@@ -1499,9 +1654,1985 @@
           </a:p>
         </p:txBody>
       </p:sp>
+      <p:sp>
+        <p:nvSpPr>
+          <p:cNvPr id="6" name="Shape 4"/>
+          <p:cNvSpPr/>
+          <p:nvPr/>
+        </p:nvSpPr>
+        <p:spPr>
+          <a:xfrm>
+            <a:off x="457200" y="1143000"/>
+            <a:ext cx="3575304" cy="4434840"/>
+          </a:xfrm>
+          <a:prstGeom prst="roundRect">
+            <a:avLst>
+              <a:gd name="adj" fmla="val 1535"/>
+            </a:avLst>
+          </a:prstGeom>
+          <a:solidFill>
+            <a:srgbClr val="E8F0FA"/>
+          </a:solidFill>
+          <a:ln w="12700">
+            <a:solidFill>
+              <a:srgbClr val="E8F0FA"/>
+            </a:solidFill>
+            <a:prstDash val="solid"/>
+          </a:ln>
+        </p:spPr>
+      </p:sp>
+      <p:sp>
+        <p:nvSpPr>
+          <p:cNvPr id="7" name="Text 5"/>
+          <p:cNvSpPr txBox="1"/>
+          <p:nvPr/>
+        </p:nvSpPr>
+        <p:spPr>
+          <a:xfrm>
+            <a:off x="640080" y="1234440"/>
+            <a:ext cx="2514600" cy="457200"/>
+          </a:xfrm>
+          <a:prstGeom prst="rect">
+            <a:avLst/>
+          </a:prstGeom>
+          <a:noFill/>
+          <a:ln/>
+        </p:spPr>
+        <p:txBody>
+          <a:bodyPr wrap="square" lIns="0" tIns="0" rIns="0" bIns="0" rtlCol="0" anchor="ctr"/>
+          <a:lstStyle/>
+          <a:p>
+            <a:pPr indent="0" marL="0">
+              <a:buNone/>
+            </a:pPr>
+            <a:r>
+              <a:rPr lang="en-US" sz="1150" b="1" dirty="0">
+                <a:solidFill>
+                  <a:srgbClr val="1F4E79"/>
+                </a:solidFill>
+                <a:latin typeface="Calibri" pitchFamily="34" charset="0"/>
+                <a:ea typeface="Calibri" pitchFamily="34" charset="-122"/>
+                <a:cs typeface="Calibri" pitchFamily="34" charset="-120"/>
+              </a:rPr>
+              <a:t>Intake 1 · Platform and corpus</a:t>
+            </a:r>
+            <a:endParaRPr lang="en-US" sz="1150" dirty="0"/>
+          </a:p>
+        </p:txBody>
+      </p:sp>
+      <p:sp>
+        <p:nvSpPr>
+          <p:cNvPr id="8" name="Text 6"/>
+          <p:cNvSpPr txBox="1"/>
+          <p:nvPr/>
+        </p:nvSpPr>
+        <p:spPr>
+          <a:xfrm>
+            <a:off x="3072384" y="1216152"/>
+            <a:ext cx="777240" cy="457200"/>
+          </a:xfrm>
+          <a:prstGeom prst="rect">
+            <a:avLst/>
+          </a:prstGeom>
+          <a:noFill/>
+          <a:ln/>
+        </p:spPr>
+        <p:txBody>
+          <a:bodyPr wrap="square" lIns="0" tIns="0" rIns="0" bIns="0" rtlCol="0" anchor="ctr"/>
+          <a:lstStyle/>
+          <a:p>
+            <a:pPr algn="r" indent="0" marL="0">
+              <a:buNone/>
+            </a:pPr>
+            <a:r>
+              <a:rPr lang="en-US" sz="2000" b="1" dirty="0">
+                <a:solidFill>
+                  <a:srgbClr val="0070C0"/>
+                </a:solidFill>
+                <a:latin typeface="Calibri" pitchFamily="34" charset="0"/>
+                <a:ea typeface="Calibri" pitchFamily="34" charset="-122"/>
+                <a:cs typeface="Calibri" pitchFamily="34" charset="-120"/>
+              </a:rPr>
+              <a:t>53</a:t>
+            </a:r>
+            <a:endParaRPr lang="en-US" sz="2000" dirty="0"/>
+          </a:p>
+        </p:txBody>
+      </p:sp>
+      <p:sp>
+        <p:nvSpPr>
+          <p:cNvPr id="9" name="Shape 7"/>
+          <p:cNvSpPr/>
+          <p:nvPr/>
+        </p:nvSpPr>
+        <p:spPr>
+          <a:xfrm>
+            <a:off x="603504" y="1755648"/>
+            <a:ext cx="3282696" cy="877824"/>
+          </a:xfrm>
+          <a:prstGeom prst="roundRect">
+            <a:avLst>
+              <a:gd name="adj" fmla="val 5208"/>
+            </a:avLst>
+          </a:prstGeom>
+          <a:solidFill>
+            <a:srgbClr val="FFFFFF"/>
+          </a:solidFill>
+          <a:ln w="9525">
+            <a:solidFill>
+              <a:srgbClr val="D9D9D9"/>
+            </a:solidFill>
+            <a:prstDash val="solid"/>
+          </a:ln>
+        </p:spPr>
+      </p:sp>
+      <p:sp>
+        <p:nvSpPr>
+          <p:cNvPr id="10" name="Text 8"/>
+          <p:cNvSpPr txBox="1"/>
+          <p:nvPr/>
+        </p:nvSpPr>
+        <p:spPr>
+          <a:xfrm>
+            <a:off x="731520" y="1810512"/>
+            <a:ext cx="2459736" cy="274320"/>
+          </a:xfrm>
+          <a:prstGeom prst="rect">
+            <a:avLst/>
+          </a:prstGeom>
+          <a:noFill/>
+          <a:ln/>
+        </p:spPr>
+        <p:txBody>
+          <a:bodyPr wrap="square" lIns="0" tIns="0" rIns="0" bIns="0" rtlCol="0" anchor="ctr"/>
+          <a:lstStyle/>
+          <a:p>
+            <a:pPr indent="0" marL="0">
+              <a:buNone/>
+            </a:pPr>
+            <a:r>
+              <a:rPr lang="en-US" sz="1050" b="1" dirty="0">
+                <a:solidFill>
+                  <a:srgbClr val="1D1D1A"/>
+                </a:solidFill>
+                <a:latin typeface="Calibri" pitchFamily="34" charset="0"/>
+                <a:ea typeface="Calibri" pitchFamily="34" charset="-122"/>
+                <a:cs typeface="Calibri" pitchFamily="34" charset="-120"/>
+              </a:rPr>
+              <a:t>1  Project and product</a:t>
+            </a:r>
+            <a:endParaRPr lang="en-US" sz="1050" dirty="0"/>
+          </a:p>
+        </p:txBody>
+      </p:sp>
+      <p:sp>
+        <p:nvSpPr>
+          <p:cNvPr id="11" name="Text 9"/>
+          <p:cNvSpPr txBox="1"/>
+          <p:nvPr/>
+        </p:nvSpPr>
+        <p:spPr>
+          <a:xfrm>
+            <a:off x="3154680" y="1792224"/>
+            <a:ext cx="603504" cy="310896"/>
+          </a:xfrm>
+          <a:prstGeom prst="rect">
+            <a:avLst/>
+          </a:prstGeom>
+          <a:noFill/>
+          <a:ln/>
+        </p:spPr>
+        <p:txBody>
+          <a:bodyPr wrap="square" lIns="0" tIns="0" rIns="0" bIns="0" rtlCol="0" anchor="ctr"/>
+          <a:lstStyle/>
+          <a:p>
+            <a:pPr algn="r" indent="0" marL="0">
+              <a:buNone/>
+            </a:pPr>
+            <a:r>
+              <a:rPr lang="en-US" sz="1600" b="1" dirty="0">
+                <a:solidFill>
+                  <a:srgbClr val="0070C0"/>
+                </a:solidFill>
+                <a:latin typeface="Calibri" pitchFamily="34" charset="0"/>
+                <a:ea typeface="Calibri" pitchFamily="34" charset="-122"/>
+                <a:cs typeface="Calibri" pitchFamily="34" charset="-120"/>
+              </a:rPr>
+              <a:t>9</a:t>
+            </a:r>
+            <a:endParaRPr lang="en-US" sz="1600" dirty="0"/>
+          </a:p>
+        </p:txBody>
+      </p:sp>
+      <p:sp>
+        <p:nvSpPr>
+          <p:cNvPr id="12" name="Text 10"/>
+          <p:cNvSpPr txBox="1"/>
+          <p:nvPr/>
+        </p:nvSpPr>
+        <p:spPr>
+          <a:xfrm>
+            <a:off x="731520" y="2103120"/>
+            <a:ext cx="3026664" cy="256032"/>
+          </a:xfrm>
+          <a:prstGeom prst="rect">
+            <a:avLst/>
+          </a:prstGeom>
+          <a:noFill/>
+          <a:ln/>
+        </p:spPr>
+        <p:txBody>
+          <a:bodyPr wrap="square" lIns="0" tIns="0" rIns="0" bIns="0" rtlCol="0" anchor="t"/>
+          <a:lstStyle/>
+          <a:p>
+            <a:pPr indent="0" marL="0">
+              <a:buNone/>
+            </a:pPr>
+            <a:r>
+              <a:rPr lang="en-US" sz="900" dirty="0">
+                <a:solidFill>
+                  <a:srgbClr val="333333"/>
+                </a:solidFill>
+                <a:latin typeface="Calibri" pitchFamily="34" charset="0"/>
+                <a:ea typeface="Calibri" pitchFamily="34" charset="-122"/>
+                <a:cs typeface="Calibri" pitchFamily="34" charset="-120"/>
+              </a:rPr>
+              <a:t>Schedule, resources and acceptance; app definition with iFLYTEK</a:t>
+            </a:r>
+            <a:endParaRPr lang="en-US" sz="900" dirty="0"/>
+          </a:p>
+        </p:txBody>
+      </p:sp>
+      <p:sp>
+        <p:nvSpPr>
+          <p:cNvPr id="13" name="Text 11"/>
+          <p:cNvSpPr txBox="1"/>
+          <p:nvPr/>
+        </p:nvSpPr>
+        <p:spPr>
+          <a:xfrm>
+            <a:off x="731520" y="2377440"/>
+            <a:ext cx="3026664" cy="237744"/>
+          </a:xfrm>
+          <a:prstGeom prst="rect">
+            <a:avLst/>
+          </a:prstGeom>
+          <a:noFill/>
+          <a:ln/>
+        </p:spPr>
+        <p:txBody>
+          <a:bodyPr wrap="square" lIns="0" tIns="0" rIns="0" bIns="0" rtlCol="0" anchor="t"/>
+          <a:lstStyle/>
+          <a:p>
+            <a:pPr indent="0" marL="0">
+              <a:buNone/>
+            </a:pPr>
+            <a:r>
+              <a:rPr lang="en-US" sz="850" b="1" dirty="0">
+                <a:solidFill>
+                  <a:srgbClr val="666666"/>
+                </a:solidFill>
+                <a:latin typeface="Calibri" pitchFamily="34" charset="0"/>
+                <a:ea typeface="Calibri" pitchFamily="34" charset="-122"/>
+                <a:cs typeface="Calibri" pitchFamily="34" charset="-120"/>
+              </a:rPr>
+              <a:t>Project managers 2 · Product managers 4 · PMO / data-centre 3</a:t>
+            </a:r>
+            <a:endParaRPr lang="en-US" sz="850" dirty="0"/>
+          </a:p>
+        </p:txBody>
+      </p:sp>
+      <p:sp>
+        <p:nvSpPr>
+          <p:cNvPr id="14" name="Shape 12"/>
+          <p:cNvSpPr/>
+          <p:nvPr/>
+        </p:nvSpPr>
+        <p:spPr>
+          <a:xfrm>
+            <a:off x="603504" y="2706624"/>
+            <a:ext cx="3282696" cy="877824"/>
+          </a:xfrm>
+          <a:prstGeom prst="roundRect">
+            <a:avLst>
+              <a:gd name="adj" fmla="val 5208"/>
+            </a:avLst>
+          </a:prstGeom>
+          <a:solidFill>
+            <a:srgbClr val="FFFFFF"/>
+          </a:solidFill>
+          <a:ln w="9525">
+            <a:solidFill>
+              <a:srgbClr val="D9D9D9"/>
+            </a:solidFill>
+            <a:prstDash val="solid"/>
+          </a:ln>
+        </p:spPr>
+      </p:sp>
+      <p:sp>
+        <p:nvSpPr>
+          <p:cNvPr id="15" name="Text 13"/>
+          <p:cNvSpPr txBox="1"/>
+          <p:nvPr/>
+        </p:nvSpPr>
+        <p:spPr>
+          <a:xfrm>
+            <a:off x="731520" y="2761488"/>
+            <a:ext cx="2459736" cy="274320"/>
+          </a:xfrm>
+          <a:prstGeom prst="rect">
+            <a:avLst/>
+          </a:prstGeom>
+          <a:noFill/>
+          <a:ln/>
+        </p:spPr>
+        <p:txBody>
+          <a:bodyPr wrap="square" lIns="0" tIns="0" rIns="0" bIns="0" rtlCol="0" anchor="ctr"/>
+          <a:lstStyle/>
+          <a:p>
+            <a:pPr indent="0" marL="0">
+              <a:buNone/>
+            </a:pPr>
+            <a:r>
+              <a:rPr lang="en-US" sz="1050" b="1" dirty="0">
+                <a:solidFill>
+                  <a:srgbClr val="1D1D1A"/>
+                </a:solidFill>
+                <a:latin typeface="Calibri" pitchFamily="34" charset="0"/>
+                <a:ea typeface="Calibri" pitchFamily="34" charset="-122"/>
+                <a:cs typeface="Calibri" pitchFamily="34" charset="-120"/>
+              </a:rPr>
+              <a:t>2  Corpus and data</a:t>
+            </a:r>
+            <a:endParaRPr lang="en-US" sz="1050" dirty="0"/>
+          </a:p>
+        </p:txBody>
+      </p:sp>
+      <p:sp>
+        <p:nvSpPr>
+          <p:cNvPr id="16" name="Text 14"/>
+          <p:cNvSpPr txBox="1"/>
+          <p:nvPr/>
+        </p:nvSpPr>
+        <p:spPr>
+          <a:xfrm>
+            <a:off x="3154680" y="2743200"/>
+            <a:ext cx="603504" cy="310896"/>
+          </a:xfrm>
+          <a:prstGeom prst="rect">
+            <a:avLst/>
+          </a:prstGeom>
+          <a:noFill/>
+          <a:ln/>
+        </p:spPr>
+        <p:txBody>
+          <a:bodyPr wrap="square" lIns="0" tIns="0" rIns="0" bIns="0" rtlCol="0" anchor="ctr"/>
+          <a:lstStyle/>
+          <a:p>
+            <a:pPr algn="r" indent="0" marL="0">
+              <a:buNone/>
+            </a:pPr>
+            <a:r>
+              <a:rPr lang="en-US" sz="1600" b="1" dirty="0">
+                <a:solidFill>
+                  <a:srgbClr val="0070C0"/>
+                </a:solidFill>
+                <a:latin typeface="Calibri" pitchFamily="34" charset="0"/>
+                <a:ea typeface="Calibri" pitchFamily="34" charset="-122"/>
+                <a:cs typeface="Calibri" pitchFamily="34" charset="-120"/>
+              </a:rPr>
+              <a:t>32</a:t>
+            </a:r>
+            <a:endParaRPr lang="en-US" sz="1600" dirty="0"/>
+          </a:p>
+        </p:txBody>
+      </p:sp>
+      <p:sp>
+        <p:nvSpPr>
+          <p:cNvPr id="17" name="Text 15"/>
+          <p:cNvSpPr txBox="1"/>
+          <p:nvPr/>
+        </p:nvSpPr>
+        <p:spPr>
+          <a:xfrm>
+            <a:off x="731520" y="3054096"/>
+            <a:ext cx="3026664" cy="256032"/>
+          </a:xfrm>
+          <a:prstGeom prst="rect">
+            <a:avLst/>
+          </a:prstGeom>
+          <a:noFill/>
+          <a:ln/>
+        </p:spPr>
+        <p:txBody>
+          <a:bodyPr wrap="square" lIns="0" tIns="0" rIns="0" bIns="0" rtlCol="0" anchor="t"/>
+          <a:lstStyle/>
+          <a:p>
+            <a:pPr indent="0" marL="0">
+              <a:buNone/>
+            </a:pPr>
+            <a:r>
+              <a:rPr lang="en-US" sz="900" dirty="0">
+                <a:solidFill>
+                  <a:srgbClr val="333333"/>
+                </a:solidFill>
+                <a:latin typeface="Calibri" pitchFamily="34" charset="0"/>
+                <a:ea typeface="Calibri" pitchFamily="34" charset="-122"/>
+                <a:cs typeface="Calibri" pitchFamily="34" charset="-120"/>
+              </a:rPr>
+              <a:t>Sources, licenses and produces the corpus to iFLYTEK's specs</a:t>
+            </a:r>
+            <a:endParaRPr lang="en-US" sz="900" dirty="0"/>
+          </a:p>
+        </p:txBody>
+      </p:sp>
+      <p:sp>
+        <p:nvSpPr>
+          <p:cNvPr id="18" name="Text 16"/>
+          <p:cNvSpPr txBox="1"/>
+          <p:nvPr/>
+        </p:nvSpPr>
+        <p:spPr>
+          <a:xfrm>
+            <a:off x="731520" y="3328416"/>
+            <a:ext cx="3026664" cy="237744"/>
+          </a:xfrm>
+          <a:prstGeom prst="rect">
+            <a:avLst/>
+          </a:prstGeom>
+          <a:noFill/>
+          <a:ln/>
+        </p:spPr>
+        <p:txBody>
+          <a:bodyPr wrap="square" lIns="0" tIns="0" rIns="0" bIns="0" rtlCol="0" anchor="t"/>
+          <a:lstStyle/>
+          <a:p>
+            <a:pPr indent="0" marL="0">
+              <a:buNone/>
+            </a:pPr>
+            <a:r>
+              <a:rPr lang="en-US" sz="850" b="1" dirty="0">
+                <a:solidFill>
+                  <a:srgbClr val="666666"/>
+                </a:solidFill>
+                <a:latin typeface="Calibri" pitchFamily="34" charset="0"/>
+                <a:ea typeface="Calibri" pitchFamily="34" charset="-122"/>
+                <a:cs typeface="Calibri" pitchFamily="34" charset="-120"/>
+              </a:rPr>
+              <a:t>Data resource 6 · Data quality 6 · Annotators 20</a:t>
+            </a:r>
+            <a:endParaRPr lang="en-US" sz="850" dirty="0"/>
+          </a:p>
+        </p:txBody>
+      </p:sp>
+      <p:sp>
+        <p:nvSpPr>
+          <p:cNvPr id="19" name="Shape 17"/>
+          <p:cNvSpPr/>
+          <p:nvPr/>
+        </p:nvSpPr>
+        <p:spPr>
+          <a:xfrm>
+            <a:off x="603504" y="3657600"/>
+            <a:ext cx="3282696" cy="877824"/>
+          </a:xfrm>
+          <a:prstGeom prst="roundRect">
+            <a:avLst>
+              <a:gd name="adj" fmla="val 5208"/>
+            </a:avLst>
+          </a:prstGeom>
+          <a:solidFill>
+            <a:srgbClr val="FFFFFF"/>
+          </a:solidFill>
+          <a:ln w="9525">
+            <a:solidFill>
+              <a:srgbClr val="D9D9D9"/>
+            </a:solidFill>
+            <a:prstDash val="solid"/>
+          </a:ln>
+        </p:spPr>
+      </p:sp>
+      <p:sp>
+        <p:nvSpPr>
+          <p:cNvPr id="20" name="Text 18"/>
+          <p:cNvSpPr txBox="1"/>
+          <p:nvPr/>
+        </p:nvSpPr>
+        <p:spPr>
+          <a:xfrm>
+            <a:off x="731520" y="3712464"/>
+            <a:ext cx="2459736" cy="274320"/>
+          </a:xfrm>
+          <a:prstGeom prst="rect">
+            <a:avLst/>
+          </a:prstGeom>
+          <a:noFill/>
+          <a:ln/>
+        </p:spPr>
+        <p:txBody>
+          <a:bodyPr wrap="square" lIns="0" tIns="0" rIns="0" bIns="0" rtlCol="0" anchor="ctr"/>
+          <a:lstStyle/>
+          <a:p>
+            <a:pPr indent="0" marL="0">
+              <a:buNone/>
+            </a:pPr>
+            <a:r>
+              <a:rPr lang="en-US" sz="1050" b="1" dirty="0">
+                <a:solidFill>
+                  <a:srgbClr val="1D1D1A"/>
+                </a:solidFill>
+                <a:latin typeface="Calibri" pitchFamily="34" charset="0"/>
+                <a:ea typeface="Calibri" pitchFamily="34" charset="-122"/>
+                <a:cs typeface="Calibri" pitchFamily="34" charset="-120"/>
+              </a:rPr>
+              <a:t>3  Portuguese language experts</a:t>
+            </a:r>
+            <a:endParaRPr lang="en-US" sz="1050" dirty="0"/>
+          </a:p>
+        </p:txBody>
+      </p:sp>
+      <p:sp>
+        <p:nvSpPr>
+          <p:cNvPr id="21" name="Text 19"/>
+          <p:cNvSpPr txBox="1"/>
+          <p:nvPr/>
+        </p:nvSpPr>
+        <p:spPr>
+          <a:xfrm>
+            <a:off x="3154680" y="3694176"/>
+            <a:ext cx="603504" cy="310896"/>
+          </a:xfrm>
+          <a:prstGeom prst="rect">
+            <a:avLst/>
+          </a:prstGeom>
+          <a:noFill/>
+          <a:ln/>
+        </p:spPr>
+        <p:txBody>
+          <a:bodyPr wrap="square" lIns="0" tIns="0" rIns="0" bIns="0" rtlCol="0" anchor="ctr"/>
+          <a:lstStyle/>
+          <a:p>
+            <a:pPr algn="r" indent="0" marL="0">
+              <a:buNone/>
+            </a:pPr>
+            <a:r>
+              <a:rPr lang="en-US" sz="1600" b="1" dirty="0">
+                <a:solidFill>
+                  <a:srgbClr val="0070C0"/>
+                </a:solidFill>
+                <a:latin typeface="Calibri" pitchFamily="34" charset="0"/>
+                <a:ea typeface="Calibri" pitchFamily="34" charset="-122"/>
+                <a:cs typeface="Calibri" pitchFamily="34" charset="-120"/>
+              </a:rPr>
+              <a:t>6</a:t>
+            </a:r>
+            <a:endParaRPr lang="en-US" sz="1600" dirty="0"/>
+          </a:p>
+        </p:txBody>
+      </p:sp>
+      <p:sp>
+        <p:nvSpPr>
+          <p:cNvPr id="22" name="Text 20"/>
+          <p:cNvSpPr txBox="1"/>
+          <p:nvPr/>
+        </p:nvSpPr>
+        <p:spPr>
+          <a:xfrm>
+            <a:off x="731520" y="4005072"/>
+            <a:ext cx="3026664" cy="256032"/>
+          </a:xfrm>
+          <a:prstGeom prst="rect">
+            <a:avLst/>
+          </a:prstGeom>
+          <a:noFill/>
+          <a:ln/>
+        </p:spPr>
+        <p:txBody>
+          <a:bodyPr wrap="square" lIns="0" tIns="0" rIns="0" bIns="0" rtlCol="0" anchor="t"/>
+          <a:lstStyle/>
+          <a:p>
+            <a:pPr indent="0" marL="0">
+              <a:buNone/>
+            </a:pPr>
+            <a:r>
+              <a:rPr lang="en-US" sz="900" dirty="0">
+                <a:solidFill>
+                  <a:srgbClr val="333333"/>
+                </a:solidFill>
+                <a:latin typeface="Calibri" pitchFamily="34" charset="0"/>
+                <a:ea typeface="Calibri" pitchFamily="34" charset="-122"/>
+                <a:cs typeface="Calibri" pitchFamily="34" charset="-120"/>
+              </a:rPr>
+              <a:t>Sets Portuguese quality and annotation standards with iFLYTEK</a:t>
+            </a:r>
+            <a:endParaRPr lang="en-US" sz="900" dirty="0"/>
+          </a:p>
+        </p:txBody>
+      </p:sp>
+      <p:sp>
+        <p:nvSpPr>
+          <p:cNvPr id="23" name="Text 21"/>
+          <p:cNvSpPr txBox="1"/>
+          <p:nvPr/>
+        </p:nvSpPr>
+        <p:spPr>
+          <a:xfrm>
+            <a:off x="731520" y="4279392"/>
+            <a:ext cx="3026664" cy="237744"/>
+          </a:xfrm>
+          <a:prstGeom prst="rect">
+            <a:avLst/>
+          </a:prstGeom>
+          <a:noFill/>
+          <a:ln/>
+        </p:spPr>
+        <p:txBody>
+          <a:bodyPr wrap="square" lIns="0" tIns="0" rIns="0" bIns="0" rtlCol="0" anchor="t"/>
+          <a:lstStyle/>
+          <a:p>
+            <a:pPr indent="0" marL="0">
+              <a:buNone/>
+            </a:pPr>
+            <a:r>
+              <a:rPr lang="en-US" sz="850" b="1" dirty="0">
+                <a:solidFill>
+                  <a:srgbClr val="666666"/>
+                </a:solidFill>
+                <a:latin typeface="Calibri" pitchFamily="34" charset="0"/>
+                <a:ea typeface="Calibri" pitchFamily="34" charset="-122"/>
+                <a:cs typeface="Calibri" pitchFamily="34" charset="-120"/>
+              </a:rPr>
+              <a:t>Language experts 6</a:t>
+            </a:r>
+            <a:endParaRPr lang="en-US" sz="850" dirty="0"/>
+          </a:p>
+        </p:txBody>
+      </p:sp>
+      <p:sp>
+        <p:nvSpPr>
+          <p:cNvPr id="24" name="Shape 22"/>
+          <p:cNvSpPr/>
+          <p:nvPr/>
+        </p:nvSpPr>
+        <p:spPr>
+          <a:xfrm>
+            <a:off x="603504" y="4608576"/>
+            <a:ext cx="3282696" cy="877824"/>
+          </a:xfrm>
+          <a:prstGeom prst="roundRect">
+            <a:avLst>
+              <a:gd name="adj" fmla="val 5208"/>
+            </a:avLst>
+          </a:prstGeom>
+          <a:solidFill>
+            <a:srgbClr val="FFFFFF"/>
+          </a:solidFill>
+          <a:ln w="9525">
+            <a:solidFill>
+              <a:srgbClr val="D9D9D9"/>
+            </a:solidFill>
+            <a:prstDash val="solid"/>
+          </a:ln>
+        </p:spPr>
+      </p:sp>
+      <p:sp>
+        <p:nvSpPr>
+          <p:cNvPr id="25" name="Text 23"/>
+          <p:cNvSpPr txBox="1"/>
+          <p:nvPr/>
+        </p:nvSpPr>
+        <p:spPr>
+          <a:xfrm>
+            <a:off x="731520" y="4663440"/>
+            <a:ext cx="2459736" cy="274320"/>
+          </a:xfrm>
+          <a:prstGeom prst="rect">
+            <a:avLst/>
+          </a:prstGeom>
+          <a:noFill/>
+          <a:ln/>
+        </p:spPr>
+        <p:txBody>
+          <a:bodyPr wrap="square" lIns="0" tIns="0" rIns="0" bIns="0" rtlCol="0" anchor="ctr"/>
+          <a:lstStyle/>
+          <a:p>
+            <a:pPr indent="0" marL="0">
+              <a:buNone/>
+            </a:pPr>
+            <a:r>
+              <a:rPr lang="en-US" sz="1050" b="1" dirty="0">
+                <a:solidFill>
+                  <a:srgbClr val="1D1D1A"/>
+                </a:solidFill>
+                <a:latin typeface="Calibri" pitchFamily="34" charset="0"/>
+                <a:ea typeface="Calibri" pitchFamily="34" charset="-122"/>
+                <a:cs typeface="Calibri" pitchFamily="34" charset="-120"/>
+              </a:rPr>
+              <a:t>4  Compliance and review</a:t>
+            </a:r>
+            <a:endParaRPr lang="en-US" sz="1050" dirty="0"/>
+          </a:p>
+        </p:txBody>
+      </p:sp>
+      <p:sp>
+        <p:nvSpPr>
+          <p:cNvPr id="26" name="Text 24"/>
+          <p:cNvSpPr txBox="1"/>
+          <p:nvPr/>
+        </p:nvSpPr>
+        <p:spPr>
+          <a:xfrm>
+            <a:off x="3154680" y="4645152"/>
+            <a:ext cx="603504" cy="310896"/>
+          </a:xfrm>
+          <a:prstGeom prst="rect">
+            <a:avLst/>
+          </a:prstGeom>
+          <a:noFill/>
+          <a:ln/>
+        </p:spPr>
+        <p:txBody>
+          <a:bodyPr wrap="square" lIns="0" tIns="0" rIns="0" bIns="0" rtlCol="0" anchor="ctr"/>
+          <a:lstStyle/>
+          <a:p>
+            <a:pPr algn="r" indent="0" marL="0">
+              <a:buNone/>
+            </a:pPr>
+            <a:r>
+              <a:rPr lang="en-US" sz="1600" b="1" dirty="0">
+                <a:solidFill>
+                  <a:srgbClr val="0070C0"/>
+                </a:solidFill>
+                <a:latin typeface="Calibri" pitchFamily="34" charset="0"/>
+                <a:ea typeface="Calibri" pitchFamily="34" charset="-122"/>
+                <a:cs typeface="Calibri" pitchFamily="34" charset="-120"/>
+              </a:rPr>
+              <a:t>6</a:t>
+            </a:r>
+            <a:endParaRPr lang="en-US" sz="1600" dirty="0"/>
+          </a:p>
+        </p:txBody>
+      </p:sp>
+      <p:sp>
+        <p:nvSpPr>
+          <p:cNvPr id="27" name="Text 25"/>
+          <p:cNvSpPr txBox="1"/>
+          <p:nvPr/>
+        </p:nvSpPr>
+        <p:spPr>
+          <a:xfrm>
+            <a:off x="731520" y="4956048"/>
+            <a:ext cx="3026664" cy="256032"/>
+          </a:xfrm>
+          <a:prstGeom prst="rect">
+            <a:avLst/>
+          </a:prstGeom>
+          <a:noFill/>
+          <a:ln/>
+        </p:spPr>
+        <p:txBody>
+          <a:bodyPr wrap="square" lIns="0" tIns="0" rIns="0" bIns="0" rtlCol="0" anchor="t"/>
+          <a:lstStyle/>
+          <a:p>
+            <a:pPr indent="0" marL="0">
+              <a:buNone/>
+            </a:pPr>
+            <a:r>
+              <a:rPr lang="en-US" sz="900" dirty="0">
+                <a:solidFill>
+                  <a:srgbClr val="333333"/>
+                </a:solidFill>
+                <a:latin typeface="Calibri" pitchFamily="34" charset="0"/>
+                <a:ea typeface="Calibri" pitchFamily="34" charset="-122"/>
+                <a:cs typeface="Calibri" pitchFamily="34" charset="-120"/>
+              </a:rPr>
+              <a:t>Content, safety and legal review; corpus licences</a:t>
+            </a:r>
+            <a:endParaRPr lang="en-US" sz="900" dirty="0"/>
+          </a:p>
+        </p:txBody>
+      </p:sp>
+      <p:sp>
+        <p:nvSpPr>
+          <p:cNvPr id="28" name="Text 26"/>
+          <p:cNvSpPr txBox="1"/>
+          <p:nvPr/>
+        </p:nvSpPr>
+        <p:spPr>
+          <a:xfrm>
+            <a:off x="731520" y="5230368"/>
+            <a:ext cx="3026664" cy="237744"/>
+          </a:xfrm>
+          <a:prstGeom prst="rect">
+            <a:avLst/>
+          </a:prstGeom>
+          <a:noFill/>
+          <a:ln/>
+        </p:spPr>
+        <p:txBody>
+          <a:bodyPr wrap="square" lIns="0" tIns="0" rIns="0" bIns="0" rtlCol="0" anchor="t"/>
+          <a:lstStyle/>
+          <a:p>
+            <a:pPr indent="0" marL="0">
+              <a:buNone/>
+            </a:pPr>
+            <a:r>
+              <a:rPr lang="en-US" sz="850" b="1" dirty="0">
+                <a:solidFill>
+                  <a:srgbClr val="666666"/>
+                </a:solidFill>
+                <a:latin typeface="Calibri" pitchFamily="34" charset="0"/>
+                <a:ea typeface="Calibri" pitchFamily="34" charset="-122"/>
+                <a:cs typeface="Calibri" pitchFamily="34" charset="-120"/>
+              </a:rPr>
+              <a:t>Review experts 2 · Legal experts 2 · Review leads 2</a:t>
+            </a:r>
+            <a:endParaRPr lang="en-US" sz="850" dirty="0"/>
+          </a:p>
+        </p:txBody>
+      </p:sp>
+      <p:sp>
+        <p:nvSpPr>
+          <p:cNvPr id="29" name="Shape 27"/>
+          <p:cNvSpPr/>
+          <p:nvPr/>
+        </p:nvSpPr>
+        <p:spPr>
+          <a:xfrm>
+            <a:off x="4306824" y="1143000"/>
+            <a:ext cx="3575304" cy="4434840"/>
+          </a:xfrm>
+          <a:prstGeom prst="roundRect">
+            <a:avLst>
+              <a:gd name="adj" fmla="val 1535"/>
+            </a:avLst>
+          </a:prstGeom>
+          <a:solidFill>
+            <a:srgbClr val="E8F0FA"/>
+          </a:solidFill>
+          <a:ln w="12700">
+            <a:solidFill>
+              <a:srgbClr val="E8F0FA"/>
+            </a:solidFill>
+            <a:prstDash val="solid"/>
+          </a:ln>
+        </p:spPr>
+      </p:sp>
+      <p:sp>
+        <p:nvSpPr>
+          <p:cNvPr id="30" name="Text 28"/>
+          <p:cNvSpPr txBox="1"/>
+          <p:nvPr/>
+        </p:nvSpPr>
+        <p:spPr>
+          <a:xfrm>
+            <a:off x="4489704" y="1234440"/>
+            <a:ext cx="2514600" cy="457200"/>
+          </a:xfrm>
+          <a:prstGeom prst="rect">
+            <a:avLst/>
+          </a:prstGeom>
+          <a:noFill/>
+          <a:ln/>
+        </p:spPr>
+        <p:txBody>
+          <a:bodyPr wrap="square" lIns="0" tIns="0" rIns="0" bIns="0" rtlCol="0" anchor="ctr"/>
+          <a:lstStyle/>
+          <a:p>
+            <a:pPr indent="0" marL="0">
+              <a:buNone/>
+            </a:pPr>
+            <a:r>
+              <a:rPr lang="en-US" sz="1150" b="1" dirty="0">
+                <a:solidFill>
+                  <a:srgbClr val="1F4E79"/>
+                </a:solidFill>
+                <a:latin typeface="Calibri" pitchFamily="34" charset="0"/>
+                <a:ea typeface="Calibri" pitchFamily="34" charset="-122"/>
+                <a:cs typeface="Calibri" pitchFamily="34" charset="-120"/>
+              </a:rPr>
+              <a:t>Intake 2 · Model training and evaluation</a:t>
+            </a:r>
+            <a:endParaRPr lang="en-US" sz="1150" dirty="0"/>
+          </a:p>
+        </p:txBody>
+      </p:sp>
+      <p:sp>
+        <p:nvSpPr>
+          <p:cNvPr id="31" name="Text 29"/>
+          <p:cNvSpPr txBox="1"/>
+          <p:nvPr/>
+        </p:nvSpPr>
+        <p:spPr>
+          <a:xfrm>
+            <a:off x="6922008" y="1216152"/>
+            <a:ext cx="777240" cy="457200"/>
+          </a:xfrm>
+          <a:prstGeom prst="rect">
+            <a:avLst/>
+          </a:prstGeom>
+          <a:noFill/>
+          <a:ln/>
+        </p:spPr>
+        <p:txBody>
+          <a:bodyPr wrap="square" lIns="0" tIns="0" rIns="0" bIns="0" rtlCol="0" anchor="ctr"/>
+          <a:lstStyle/>
+          <a:p>
+            <a:pPr algn="r" indent="0" marL="0">
+              <a:buNone/>
+            </a:pPr>
+            <a:r>
+              <a:rPr lang="en-US" sz="2000" b="1" dirty="0">
+                <a:solidFill>
+                  <a:srgbClr val="0070C0"/>
+                </a:solidFill>
+                <a:latin typeface="Calibri" pitchFamily="34" charset="0"/>
+                <a:ea typeface="Calibri" pitchFamily="34" charset="-122"/>
+                <a:cs typeface="Calibri" pitchFamily="34" charset="-120"/>
+              </a:rPr>
+              <a:t>25</a:t>
+            </a:r>
+            <a:endParaRPr lang="en-US" sz="2000" dirty="0"/>
+          </a:p>
+        </p:txBody>
+      </p:sp>
+      <p:sp>
+        <p:nvSpPr>
+          <p:cNvPr id="32" name="Shape 30"/>
+          <p:cNvSpPr/>
+          <p:nvPr/>
+        </p:nvSpPr>
+        <p:spPr>
+          <a:xfrm>
+            <a:off x="4453128" y="1755648"/>
+            <a:ext cx="3282696" cy="1828800"/>
+          </a:xfrm>
+          <a:prstGeom prst="roundRect">
+            <a:avLst>
+              <a:gd name="adj" fmla="val 2500"/>
+            </a:avLst>
+          </a:prstGeom>
+          <a:solidFill>
+            <a:srgbClr val="FFFFFF"/>
+          </a:solidFill>
+          <a:ln w="9525">
+            <a:solidFill>
+              <a:srgbClr val="D9D9D9"/>
+            </a:solidFill>
+            <a:prstDash val="solid"/>
+          </a:ln>
+        </p:spPr>
+      </p:sp>
+      <p:sp>
+        <p:nvSpPr>
+          <p:cNvPr id="33" name="Text 31"/>
+          <p:cNvSpPr txBox="1"/>
+          <p:nvPr/>
+        </p:nvSpPr>
+        <p:spPr>
+          <a:xfrm>
+            <a:off x="4581144" y="1810512"/>
+            <a:ext cx="2459736" cy="274320"/>
+          </a:xfrm>
+          <a:prstGeom prst="rect">
+            <a:avLst/>
+          </a:prstGeom>
+          <a:noFill/>
+          <a:ln/>
+        </p:spPr>
+        <p:txBody>
+          <a:bodyPr wrap="square" lIns="0" tIns="0" rIns="0" bIns="0" rtlCol="0" anchor="ctr"/>
+          <a:lstStyle/>
+          <a:p>
+            <a:pPr indent="0" marL="0">
+              <a:buNone/>
+            </a:pPr>
+            <a:r>
+              <a:rPr lang="en-US" sz="1050" b="1" dirty="0">
+                <a:solidFill>
+                  <a:srgbClr val="1D1D1A"/>
+                </a:solidFill>
+                <a:latin typeface="Calibri" pitchFamily="34" charset="0"/>
+                <a:ea typeface="Calibri" pitchFamily="34" charset="-122"/>
+                <a:cs typeface="Calibri" pitchFamily="34" charset="-120"/>
+              </a:rPr>
+              <a:t>5  Business and domain experts</a:t>
+            </a:r>
+            <a:endParaRPr lang="en-US" sz="1050" dirty="0"/>
+          </a:p>
+        </p:txBody>
+      </p:sp>
+      <p:sp>
+        <p:nvSpPr>
+          <p:cNvPr id="34" name="Text 32"/>
+          <p:cNvSpPr txBox="1"/>
+          <p:nvPr/>
+        </p:nvSpPr>
+        <p:spPr>
+          <a:xfrm>
+            <a:off x="7004304" y="1792224"/>
+            <a:ext cx="603504" cy="310896"/>
+          </a:xfrm>
+          <a:prstGeom prst="rect">
+            <a:avLst/>
+          </a:prstGeom>
+          <a:noFill/>
+          <a:ln/>
+        </p:spPr>
+        <p:txBody>
+          <a:bodyPr wrap="square" lIns="0" tIns="0" rIns="0" bIns="0" rtlCol="0" anchor="ctr"/>
+          <a:lstStyle/>
+          <a:p>
+            <a:pPr algn="r" indent="0" marL="0">
+              <a:buNone/>
+            </a:pPr>
+            <a:r>
+              <a:rPr lang="en-US" sz="1600" b="1" dirty="0">
+                <a:solidFill>
+                  <a:srgbClr val="0070C0"/>
+                </a:solidFill>
+                <a:latin typeface="Calibri" pitchFamily="34" charset="0"/>
+                <a:ea typeface="Calibri" pitchFamily="34" charset="-122"/>
+                <a:cs typeface="Calibri" pitchFamily="34" charset="-120"/>
+              </a:rPr>
+              <a:t>7</a:t>
+            </a:r>
+            <a:endParaRPr lang="en-US" sz="1600" dirty="0"/>
+          </a:p>
+        </p:txBody>
+      </p:sp>
+      <p:sp>
+        <p:nvSpPr>
+          <p:cNvPr id="35" name="Text 33"/>
+          <p:cNvSpPr txBox="1"/>
+          <p:nvPr/>
+        </p:nvSpPr>
+        <p:spPr>
+          <a:xfrm>
+            <a:off x="4581144" y="2103120"/>
+            <a:ext cx="3026664" cy="566928"/>
+          </a:xfrm>
+          <a:prstGeom prst="rect">
+            <a:avLst/>
+          </a:prstGeom>
+          <a:noFill/>
+          <a:ln/>
+        </p:spPr>
+        <p:txBody>
+          <a:bodyPr wrap="square" lIns="0" tIns="0" rIns="0" bIns="0" rtlCol="0" anchor="t"/>
+          <a:lstStyle/>
+          <a:p>
+            <a:pPr indent="0" marL="0">
+              <a:buNone/>
+            </a:pPr>
+            <a:r>
+              <a:rPr lang="en-US" sz="900" dirty="0">
+                <a:solidFill>
+                  <a:srgbClr val="333333"/>
+                </a:solidFill>
+                <a:latin typeface="Calibri" pitchFamily="34" charset="0"/>
+                <a:ea typeface="Calibri" pitchFamily="34" charset="-122"/>
+                <a:cs typeface="Calibri" pitchFamily="34" charset="-120"/>
+              </a:rPr>
+              <a:t>Confirms the scenarios for the three Domain Large Models and assesses domain results with iFLYTEK</a:t>
+            </a:r>
+            <a:endParaRPr lang="en-US" sz="900" dirty="0"/>
+          </a:p>
+        </p:txBody>
+      </p:sp>
+      <p:sp>
+        <p:nvSpPr>
+          <p:cNvPr id="36" name="Text 34"/>
+          <p:cNvSpPr txBox="1"/>
+          <p:nvPr/>
+        </p:nvSpPr>
+        <p:spPr>
+          <a:xfrm>
+            <a:off x="4581144" y="2651760"/>
+            <a:ext cx="3026664" cy="457200"/>
+          </a:xfrm>
+          <a:prstGeom prst="rect">
+            <a:avLst/>
+          </a:prstGeom>
+          <a:noFill/>
+          <a:ln/>
+        </p:spPr>
+        <p:txBody>
+          <a:bodyPr wrap="square" lIns="0" tIns="0" rIns="0" bIns="0" rtlCol="0" anchor="t"/>
+          <a:lstStyle/>
+          <a:p>
+            <a:pPr indent="0" marL="0">
+              <a:buNone/>
+            </a:pPr>
+            <a:r>
+              <a:rPr lang="en-US" sz="850" b="1" dirty="0">
+                <a:solidFill>
+                  <a:srgbClr val="666666"/>
+                </a:solidFill>
+                <a:latin typeface="Calibri" pitchFamily="34" charset="0"/>
+                <a:ea typeface="Calibri" pitchFamily="34" charset="-122"/>
+                <a:cs typeface="Calibri" pitchFamily="34" charset="-120"/>
+              </a:rPr>
+              <a:t>Business requirements 3 · Domain requirements 2 · Domain experts 2</a:t>
+            </a:r>
+            <a:endParaRPr lang="en-US" sz="850" dirty="0"/>
+          </a:p>
+        </p:txBody>
+      </p:sp>
+      <p:sp>
+        <p:nvSpPr>
+          <p:cNvPr id="37" name="Shape 35"/>
+          <p:cNvSpPr/>
+          <p:nvPr/>
+        </p:nvSpPr>
+        <p:spPr>
+          <a:xfrm>
+            <a:off x="4453128" y="3657600"/>
+            <a:ext cx="3282696" cy="1828800"/>
+          </a:xfrm>
+          <a:prstGeom prst="roundRect">
+            <a:avLst>
+              <a:gd name="adj" fmla="val 2500"/>
+            </a:avLst>
+          </a:prstGeom>
+          <a:solidFill>
+            <a:srgbClr val="FFFFFF"/>
+          </a:solidFill>
+          <a:ln w="9525">
+            <a:solidFill>
+              <a:srgbClr val="D9D9D9"/>
+            </a:solidFill>
+            <a:prstDash val="solid"/>
+          </a:ln>
+        </p:spPr>
+      </p:sp>
+      <p:sp>
+        <p:nvSpPr>
+          <p:cNvPr id="38" name="Text 36"/>
+          <p:cNvSpPr txBox="1"/>
+          <p:nvPr/>
+        </p:nvSpPr>
+        <p:spPr>
+          <a:xfrm>
+            <a:off x="4581144" y="3712464"/>
+            <a:ext cx="2459736" cy="274320"/>
+          </a:xfrm>
+          <a:prstGeom prst="rect">
+            <a:avLst/>
+          </a:prstGeom>
+          <a:noFill/>
+          <a:ln/>
+        </p:spPr>
+        <p:txBody>
+          <a:bodyPr wrap="square" lIns="0" tIns="0" rIns="0" bIns="0" rtlCol="0" anchor="ctr"/>
+          <a:lstStyle/>
+          <a:p>
+            <a:pPr indent="0" marL="0">
+              <a:buNone/>
+            </a:pPr>
+            <a:r>
+              <a:rPr lang="en-US" sz="1050" b="1" dirty="0">
+                <a:solidFill>
+                  <a:srgbClr val="1D1D1A"/>
+                </a:solidFill>
+                <a:latin typeface="Calibri" pitchFamily="34" charset="0"/>
+                <a:ea typeface="Calibri" pitchFamily="34" charset="-122"/>
+                <a:cs typeface="Calibri" pitchFamily="34" charset="-120"/>
+              </a:rPr>
+              <a:t>6  Model and test engineering</a:t>
+            </a:r>
+            <a:endParaRPr lang="en-US" sz="1050" dirty="0"/>
+          </a:p>
+        </p:txBody>
+      </p:sp>
+      <p:sp>
+        <p:nvSpPr>
+          <p:cNvPr id="39" name="Text 37"/>
+          <p:cNvSpPr txBox="1"/>
+          <p:nvPr/>
+        </p:nvSpPr>
+        <p:spPr>
+          <a:xfrm>
+            <a:off x="7004304" y="3694176"/>
+            <a:ext cx="603504" cy="310896"/>
+          </a:xfrm>
+          <a:prstGeom prst="rect">
+            <a:avLst/>
+          </a:prstGeom>
+          <a:noFill/>
+          <a:ln/>
+        </p:spPr>
+        <p:txBody>
+          <a:bodyPr wrap="square" lIns="0" tIns="0" rIns="0" bIns="0" rtlCol="0" anchor="ctr"/>
+          <a:lstStyle/>
+          <a:p>
+            <a:pPr algn="r" indent="0" marL="0">
+              <a:buNone/>
+            </a:pPr>
+            <a:r>
+              <a:rPr lang="en-US" sz="1600" b="1" dirty="0">
+                <a:solidFill>
+                  <a:srgbClr val="0070C0"/>
+                </a:solidFill>
+                <a:latin typeface="Calibri" pitchFamily="34" charset="0"/>
+                <a:ea typeface="Calibri" pitchFamily="34" charset="-122"/>
+                <a:cs typeface="Calibri" pitchFamily="34" charset="-120"/>
+              </a:rPr>
+              <a:t>18</a:t>
+            </a:r>
+            <a:endParaRPr lang="en-US" sz="1600" dirty="0"/>
+          </a:p>
+        </p:txBody>
+      </p:sp>
+      <p:sp>
+        <p:nvSpPr>
+          <p:cNvPr id="40" name="Text 38"/>
+          <p:cNvSpPr txBox="1"/>
+          <p:nvPr/>
+        </p:nvSpPr>
+        <p:spPr>
+          <a:xfrm>
+            <a:off x="4581144" y="4005072"/>
+            <a:ext cx="3026664" cy="566928"/>
+          </a:xfrm>
+          <a:prstGeom prst="rect">
+            <a:avLst/>
+          </a:prstGeom>
+          <a:noFill/>
+          <a:ln/>
+        </p:spPr>
+        <p:txBody>
+          <a:bodyPr wrap="square" lIns="0" tIns="0" rIns="0" bIns="0" rtlCol="0" anchor="t"/>
+          <a:lstStyle/>
+          <a:p>
+            <a:pPr indent="0" marL="0">
+              <a:buNone/>
+            </a:pPr>
+            <a:r>
+              <a:rPr lang="en-US" sz="900" dirty="0">
+                <a:solidFill>
+                  <a:srgbClr val="333333"/>
+                </a:solidFill>
+                <a:latin typeface="Calibri" pitchFamily="34" charset="0"/>
+                <a:ea typeface="Calibri" pitchFamily="34" charset="-122"/>
+                <a:cs typeface="Calibri" pitchFamily="34" charset="-120"/>
+              </a:rPr>
+              <a:t>Trains and evaluates the national model with iFLYTEK's engineers, then trains the DLMs with iFLYTEK advising</a:t>
+            </a:r>
+            <a:endParaRPr lang="en-US" sz="900" dirty="0"/>
+          </a:p>
+        </p:txBody>
+      </p:sp>
+      <p:sp>
+        <p:nvSpPr>
+          <p:cNvPr id="41" name="Text 39"/>
+          <p:cNvSpPr txBox="1"/>
+          <p:nvPr/>
+        </p:nvSpPr>
+        <p:spPr>
+          <a:xfrm>
+            <a:off x="4581144" y="4553712"/>
+            <a:ext cx="3026664" cy="457200"/>
+          </a:xfrm>
+          <a:prstGeom prst="rect">
+            <a:avLst/>
+          </a:prstGeom>
+          <a:noFill/>
+          <a:ln/>
+        </p:spPr>
+        <p:txBody>
+          <a:bodyPr wrap="square" lIns="0" tIns="0" rIns="0" bIns="0" rtlCol="0" anchor="t"/>
+          <a:lstStyle/>
+          <a:p>
+            <a:pPr indent="0" marL="0">
+              <a:buNone/>
+            </a:pPr>
+            <a:r>
+              <a:rPr lang="en-US" sz="850" b="1" dirty="0">
+                <a:solidFill>
+                  <a:srgbClr val="666666"/>
+                </a:solidFill>
+                <a:latin typeface="Calibri" pitchFamily="34" charset="0"/>
+                <a:ea typeface="Calibri" pitchFamily="34" charset="-122"/>
+                <a:cs typeface="Calibri" pitchFamily="34" charset="-120"/>
+              </a:rPr>
+              <a:t>Algorithm engineers 12 · Test engineers 6</a:t>
+            </a:r>
+            <a:endParaRPr lang="en-US" sz="850" dirty="0"/>
+          </a:p>
+        </p:txBody>
+      </p:sp>
+      <p:sp>
+        <p:nvSpPr>
+          <p:cNvPr id="42" name="Shape 40"/>
+          <p:cNvSpPr/>
+          <p:nvPr/>
+        </p:nvSpPr>
+        <p:spPr>
+          <a:xfrm>
+            <a:off x="8156448" y="1143000"/>
+            <a:ext cx="3575304" cy="4434840"/>
+          </a:xfrm>
+          <a:prstGeom prst="roundRect">
+            <a:avLst>
+              <a:gd name="adj" fmla="val 1535"/>
+            </a:avLst>
+          </a:prstGeom>
+          <a:solidFill>
+            <a:srgbClr val="E8F0FA"/>
+          </a:solidFill>
+          <a:ln w="12700">
+            <a:solidFill>
+              <a:srgbClr val="E8F0FA"/>
+            </a:solidFill>
+            <a:prstDash val="solid"/>
+          </a:ln>
+        </p:spPr>
+      </p:sp>
+      <p:sp>
+        <p:nvSpPr>
+          <p:cNvPr id="43" name="Text 41"/>
+          <p:cNvSpPr txBox="1"/>
+          <p:nvPr/>
+        </p:nvSpPr>
+        <p:spPr>
+          <a:xfrm>
+            <a:off x="8339328" y="1234440"/>
+            <a:ext cx="2514600" cy="457200"/>
+          </a:xfrm>
+          <a:prstGeom prst="rect">
+            <a:avLst/>
+          </a:prstGeom>
+          <a:noFill/>
+          <a:ln/>
+        </p:spPr>
+        <p:txBody>
+          <a:bodyPr wrap="square" lIns="0" tIns="0" rIns="0" bIns="0" rtlCol="0" anchor="ctr"/>
+          <a:lstStyle/>
+          <a:p>
+            <a:pPr indent="0" marL="0">
+              <a:buNone/>
+            </a:pPr>
+            <a:r>
+              <a:rPr lang="en-US" sz="1150" b="1" dirty="0">
+                <a:solidFill>
+                  <a:srgbClr val="1F4E79"/>
+                </a:solidFill>
+                <a:latin typeface="Calibri" pitchFamily="34" charset="0"/>
+                <a:ea typeface="Calibri" pitchFamily="34" charset="-122"/>
+                <a:cs typeface="Calibri" pitchFamily="34" charset="-120"/>
+              </a:rPr>
+              <a:t>Intake 3 · Application and DLM</a:t>
+            </a:r>
+            <a:endParaRPr lang="en-US" sz="1150" dirty="0"/>
+          </a:p>
+        </p:txBody>
+      </p:sp>
+      <p:sp>
+        <p:nvSpPr>
+          <p:cNvPr id="44" name="Text 42"/>
+          <p:cNvSpPr txBox="1"/>
+          <p:nvPr/>
+        </p:nvSpPr>
+        <p:spPr>
+          <a:xfrm>
+            <a:off x="10771632" y="1216152"/>
+            <a:ext cx="777240" cy="457200"/>
+          </a:xfrm>
+          <a:prstGeom prst="rect">
+            <a:avLst/>
+          </a:prstGeom>
+          <a:noFill/>
+          <a:ln/>
+        </p:spPr>
+        <p:txBody>
+          <a:bodyPr wrap="square" lIns="0" tIns="0" rIns="0" bIns="0" rtlCol="0" anchor="ctr"/>
+          <a:lstStyle/>
+          <a:p>
+            <a:pPr algn="r" indent="0" marL="0">
+              <a:buNone/>
+            </a:pPr>
+            <a:r>
+              <a:rPr lang="en-US" sz="2000" b="1" dirty="0">
+                <a:solidFill>
+                  <a:srgbClr val="0070C0"/>
+                </a:solidFill>
+                <a:latin typeface="Calibri" pitchFamily="34" charset="0"/>
+                <a:ea typeface="Calibri" pitchFamily="34" charset="-122"/>
+                <a:cs typeface="Calibri" pitchFamily="34" charset="-120"/>
+              </a:rPr>
+              <a:t>33</a:t>
+            </a:r>
+            <a:endParaRPr lang="en-US" sz="2000" dirty="0"/>
+          </a:p>
+        </p:txBody>
+      </p:sp>
+      <p:sp>
+        <p:nvSpPr>
+          <p:cNvPr id="45" name="Shape 43"/>
+          <p:cNvSpPr/>
+          <p:nvPr/>
+        </p:nvSpPr>
+        <p:spPr>
+          <a:xfrm>
+            <a:off x="8302752" y="1755648"/>
+            <a:ext cx="3282696" cy="1828800"/>
+          </a:xfrm>
+          <a:prstGeom prst="roundRect">
+            <a:avLst>
+              <a:gd name="adj" fmla="val 2500"/>
+            </a:avLst>
+          </a:prstGeom>
+          <a:solidFill>
+            <a:srgbClr val="FFFFFF"/>
+          </a:solidFill>
+          <a:ln w="9525">
+            <a:solidFill>
+              <a:srgbClr val="D9D9D9"/>
+            </a:solidFill>
+            <a:prstDash val="solid"/>
+          </a:ln>
+        </p:spPr>
+      </p:sp>
+      <p:sp>
+        <p:nvSpPr>
+          <p:cNvPr id="46" name="Text 44"/>
+          <p:cNvSpPr txBox="1"/>
+          <p:nvPr/>
+        </p:nvSpPr>
+        <p:spPr>
+          <a:xfrm>
+            <a:off x="8430768" y="1810512"/>
+            <a:ext cx="2459736" cy="274320"/>
+          </a:xfrm>
+          <a:prstGeom prst="rect">
+            <a:avLst/>
+          </a:prstGeom>
+          <a:noFill/>
+          <a:ln/>
+        </p:spPr>
+        <p:txBody>
+          <a:bodyPr wrap="square" lIns="0" tIns="0" rIns="0" bIns="0" rtlCol="0" anchor="ctr"/>
+          <a:lstStyle/>
+          <a:p>
+            <a:pPr indent="0" marL="0">
+              <a:buNone/>
+            </a:pPr>
+            <a:r>
+              <a:rPr lang="en-US" sz="1050" b="1" dirty="0">
+                <a:solidFill>
+                  <a:srgbClr val="1D1D1A"/>
+                </a:solidFill>
+                <a:latin typeface="Calibri" pitchFamily="34" charset="0"/>
+                <a:ea typeface="Calibri" pitchFamily="34" charset="-122"/>
+                <a:cs typeface="Calibri" pitchFamily="34" charset="-120"/>
+              </a:rPr>
+              <a:t>7  Application and operations</a:t>
+            </a:r>
+            <a:endParaRPr lang="en-US" sz="1050" dirty="0"/>
+          </a:p>
+        </p:txBody>
+      </p:sp>
+      <p:sp>
+        <p:nvSpPr>
+          <p:cNvPr id="47" name="Text 45"/>
+          <p:cNvSpPr txBox="1"/>
+          <p:nvPr/>
+        </p:nvSpPr>
+        <p:spPr>
+          <a:xfrm>
+            <a:off x="10853928" y="1792224"/>
+            <a:ext cx="603504" cy="310896"/>
+          </a:xfrm>
+          <a:prstGeom prst="rect">
+            <a:avLst/>
+          </a:prstGeom>
+          <a:noFill/>
+          <a:ln/>
+        </p:spPr>
+        <p:txBody>
+          <a:bodyPr wrap="square" lIns="0" tIns="0" rIns="0" bIns="0" rtlCol="0" anchor="ctr"/>
+          <a:lstStyle/>
+          <a:p>
+            <a:pPr algn="r" indent="0" marL="0">
+              <a:buNone/>
+            </a:pPr>
+            <a:r>
+              <a:rPr lang="en-US" sz="1600" b="1" dirty="0">
+                <a:solidFill>
+                  <a:srgbClr val="0070C0"/>
+                </a:solidFill>
+                <a:latin typeface="Calibri" pitchFamily="34" charset="0"/>
+                <a:ea typeface="Calibri" pitchFamily="34" charset="-122"/>
+                <a:cs typeface="Calibri" pitchFamily="34" charset="-120"/>
+              </a:rPr>
+              <a:t>27</a:t>
+            </a:r>
+            <a:endParaRPr lang="en-US" sz="1600" dirty="0"/>
+          </a:p>
+        </p:txBody>
+      </p:sp>
+      <p:sp>
+        <p:nvSpPr>
+          <p:cNvPr id="48" name="Text 46"/>
+          <p:cNvSpPr txBox="1"/>
+          <p:nvPr/>
+        </p:nvSpPr>
+        <p:spPr>
+          <a:xfrm>
+            <a:off x="8430768" y="2103120"/>
+            <a:ext cx="3026664" cy="566928"/>
+          </a:xfrm>
+          <a:prstGeom prst="rect">
+            <a:avLst/>
+          </a:prstGeom>
+          <a:noFill/>
+          <a:ln/>
+        </p:spPr>
+        <p:txBody>
+          <a:bodyPr wrap="square" lIns="0" tIns="0" rIns="0" bIns="0" rtlCol="0" anchor="t"/>
+          <a:lstStyle/>
+          <a:p>
+            <a:pPr indent="0" marL="0">
+              <a:buNone/>
+            </a:pPr>
+            <a:r>
+              <a:rPr lang="en-US" sz="900" dirty="0">
+                <a:solidFill>
+                  <a:srgbClr val="333333"/>
+                </a:solidFill>
+                <a:latin typeface="Calibri" pitchFamily="34" charset="0"/>
+                <a:ea typeface="Calibri" pitchFamily="34" charset="-122"/>
+                <a:cs typeface="Calibri" pitchFamily="34" charset="-120"/>
+              </a:rPr>
+              <a:t>Takes over the National AI Application from iFLYTEK: architecture, integration, user approval, content and operations</a:t>
+            </a:r>
+            <a:endParaRPr lang="en-US" sz="900" dirty="0"/>
+          </a:p>
+        </p:txBody>
+      </p:sp>
+      <p:sp>
+        <p:nvSpPr>
+          <p:cNvPr id="49" name="Text 47"/>
+          <p:cNvSpPr txBox="1"/>
+          <p:nvPr/>
+        </p:nvSpPr>
+        <p:spPr>
+          <a:xfrm>
+            <a:off x="8430768" y="2651760"/>
+            <a:ext cx="3026664" cy="457200"/>
+          </a:xfrm>
+          <a:prstGeom prst="rect">
+            <a:avLst/>
+          </a:prstGeom>
+          <a:noFill/>
+          <a:ln/>
+        </p:spPr>
+        <p:txBody>
+          <a:bodyPr wrap="square" lIns="0" tIns="0" rIns="0" bIns="0" rtlCol="0" anchor="t"/>
+          <a:lstStyle/>
+          <a:p>
+            <a:pPr indent="0" marL="0">
+              <a:buNone/>
+            </a:pPr>
+            <a:r>
+              <a:rPr lang="en-US" sz="850" b="1" dirty="0">
+                <a:solidFill>
+                  <a:srgbClr val="666666"/>
+                </a:solidFill>
+                <a:latin typeface="Calibri" pitchFamily="34" charset="0"/>
+                <a:ea typeface="Calibri" pitchFamily="34" charset="-122"/>
+                <a:cs typeface="Calibri" pitchFamily="34" charset="-120"/>
+              </a:rPr>
+              <a:t>Software developers 15 · Operations engineers 10 · Architects 2</a:t>
+            </a:r>
+            <a:endParaRPr lang="en-US" sz="850" dirty="0"/>
+          </a:p>
+        </p:txBody>
+      </p:sp>
+      <p:sp>
+        <p:nvSpPr>
+          <p:cNvPr id="50" name="Shape 48"/>
+          <p:cNvSpPr/>
+          <p:nvPr/>
+        </p:nvSpPr>
+        <p:spPr>
+          <a:xfrm>
+            <a:off x="8302752" y="3657600"/>
+            <a:ext cx="3282696" cy="1828800"/>
+          </a:xfrm>
+          <a:prstGeom prst="roundRect">
+            <a:avLst>
+              <a:gd name="adj" fmla="val 2500"/>
+            </a:avLst>
+          </a:prstGeom>
+          <a:solidFill>
+            <a:srgbClr val="FFFFFF"/>
+          </a:solidFill>
+          <a:ln w="9525">
+            <a:solidFill>
+              <a:srgbClr val="D9D9D9"/>
+            </a:solidFill>
+            <a:prstDash val="solid"/>
+          </a:ln>
+        </p:spPr>
+      </p:sp>
+      <p:sp>
+        <p:nvSpPr>
+          <p:cNvPr id="51" name="Text 49"/>
+          <p:cNvSpPr txBox="1"/>
+          <p:nvPr/>
+        </p:nvSpPr>
+        <p:spPr>
+          <a:xfrm>
+            <a:off x="8430768" y="3712464"/>
+            <a:ext cx="2459736" cy="274320"/>
+          </a:xfrm>
+          <a:prstGeom prst="rect">
+            <a:avLst/>
+          </a:prstGeom>
+          <a:noFill/>
+          <a:ln/>
+        </p:spPr>
+        <p:txBody>
+          <a:bodyPr wrap="square" lIns="0" tIns="0" rIns="0" bIns="0" rtlCol="0" anchor="ctr"/>
+          <a:lstStyle/>
+          <a:p>
+            <a:pPr indent="0" marL="0">
+              <a:buNone/>
+            </a:pPr>
+            <a:r>
+              <a:rPr lang="en-US" sz="1050" b="1" dirty="0">
+                <a:solidFill>
+                  <a:srgbClr val="1D1D1A"/>
+                </a:solidFill>
+                <a:latin typeface="Calibri" pitchFamily="34" charset="0"/>
+                <a:ea typeface="Calibri" pitchFamily="34" charset="-122"/>
+                <a:cs typeface="Calibri" pitchFamily="34" charset="-120"/>
+              </a:rPr>
+              <a:t>8  Platform O&amp;M</a:t>
+            </a:r>
+            <a:endParaRPr lang="en-US" sz="1050" dirty="0"/>
+          </a:p>
+        </p:txBody>
+      </p:sp>
+      <p:sp>
+        <p:nvSpPr>
+          <p:cNvPr id="52" name="Text 50"/>
+          <p:cNvSpPr txBox="1"/>
+          <p:nvPr/>
+        </p:nvSpPr>
+        <p:spPr>
+          <a:xfrm>
+            <a:off x="10853928" y="3694176"/>
+            <a:ext cx="603504" cy="310896"/>
+          </a:xfrm>
+          <a:prstGeom prst="rect">
+            <a:avLst/>
+          </a:prstGeom>
+          <a:noFill/>
+          <a:ln/>
+        </p:spPr>
+        <p:txBody>
+          <a:bodyPr wrap="square" lIns="0" tIns="0" rIns="0" bIns="0" rtlCol="0" anchor="ctr"/>
+          <a:lstStyle/>
+          <a:p>
+            <a:pPr algn="r" indent="0" marL="0">
+              <a:buNone/>
+            </a:pPr>
+            <a:r>
+              <a:rPr lang="en-US" sz="1600" b="1" dirty="0">
+                <a:solidFill>
+                  <a:srgbClr val="0070C0"/>
+                </a:solidFill>
+                <a:latin typeface="Calibri" pitchFamily="34" charset="0"/>
+                <a:ea typeface="Calibri" pitchFamily="34" charset="-122"/>
+                <a:cs typeface="Calibri" pitchFamily="34" charset="-120"/>
+              </a:rPr>
+              <a:t>6</a:t>
+            </a:r>
+            <a:endParaRPr lang="en-US" sz="1600" dirty="0"/>
+          </a:p>
+        </p:txBody>
+      </p:sp>
+      <p:sp>
+        <p:nvSpPr>
+          <p:cNvPr id="53" name="Text 51"/>
+          <p:cNvSpPr txBox="1"/>
+          <p:nvPr/>
+        </p:nvSpPr>
+        <p:spPr>
+          <a:xfrm>
+            <a:off x="8430768" y="4005072"/>
+            <a:ext cx="3026664" cy="566928"/>
+          </a:xfrm>
+          <a:prstGeom prst="rect">
+            <a:avLst/>
+          </a:prstGeom>
+          <a:noFill/>
+          <a:ln/>
+        </p:spPr>
+        <p:txBody>
+          <a:bodyPr wrap="square" lIns="0" tIns="0" rIns="0" bIns="0" rtlCol="0" anchor="t"/>
+          <a:lstStyle/>
+          <a:p>
+            <a:pPr indent="0" marL="0">
+              <a:buNone/>
+            </a:pPr>
+            <a:r>
+              <a:rPr lang="en-US" sz="900" dirty="0">
+                <a:solidFill>
+                  <a:srgbClr val="333333"/>
+                </a:solidFill>
+                <a:latin typeface="Calibri" pitchFamily="34" charset="0"/>
+                <a:ea typeface="Calibri" pitchFamily="34" charset="-122"/>
+                <a:cs typeface="Calibri" pitchFamily="34" charset="-120"/>
+              </a:rPr>
+              <a:t>Runs the platform with iFLYTEK during 12 months of assisted O&amp;M, then independently</a:t>
+            </a:r>
+            <a:endParaRPr lang="en-US" sz="900" dirty="0"/>
+          </a:p>
+        </p:txBody>
+      </p:sp>
+      <p:sp>
+        <p:nvSpPr>
+          <p:cNvPr id="54" name="Text 52"/>
+          <p:cNvSpPr txBox="1"/>
+          <p:nvPr/>
+        </p:nvSpPr>
+        <p:spPr>
+          <a:xfrm>
+            <a:off x="8430768" y="4553712"/>
+            <a:ext cx="3026664" cy="457200"/>
+          </a:xfrm>
+          <a:prstGeom prst="rect">
+            <a:avLst/>
+          </a:prstGeom>
+          <a:noFill/>
+          <a:ln/>
+        </p:spPr>
+        <p:txBody>
+          <a:bodyPr wrap="square" lIns="0" tIns="0" rIns="0" bIns="0" rtlCol="0" anchor="t"/>
+          <a:lstStyle/>
+          <a:p>
+            <a:pPr indent="0" marL="0">
+              <a:buNone/>
+            </a:pPr>
+            <a:r>
+              <a:rPr lang="en-US" sz="850" b="1" dirty="0">
+                <a:solidFill>
+                  <a:srgbClr val="666666"/>
+                </a:solidFill>
+                <a:latin typeface="Calibri" pitchFamily="34" charset="0"/>
+                <a:ea typeface="Calibri" pitchFamily="34" charset="-122"/>
+                <a:cs typeface="Calibri" pitchFamily="34" charset="-120"/>
+              </a:rPr>
+              <a:t>O&amp;M engineers 6</a:t>
+            </a:r>
+            <a:endParaRPr lang="en-US" sz="850" dirty="0"/>
+          </a:p>
+        </p:txBody>
+      </p:sp>
+      <p:sp>
+        <p:nvSpPr>
+          <p:cNvPr id="55" name="Shape 53"/>
+          <p:cNvSpPr/>
+          <p:nvPr/>
+        </p:nvSpPr>
+        <p:spPr>
+          <a:xfrm>
+            <a:off x="457200" y="5742432"/>
+            <a:ext cx="11274552" cy="502920"/>
+          </a:xfrm>
+          <a:prstGeom prst="roundRect">
+            <a:avLst>
+              <a:gd name="adj" fmla="val 10909"/>
+            </a:avLst>
+          </a:prstGeom>
+          <a:solidFill>
+            <a:srgbClr val="FFFFFF"/>
+          </a:solidFill>
+          <a:ln w="9525">
+            <a:solidFill>
+              <a:srgbClr val="1F4E79"/>
+            </a:solidFill>
+            <a:prstDash val="solid"/>
+          </a:ln>
+        </p:spPr>
+      </p:sp>
+      <p:sp>
+        <p:nvSpPr>
+          <p:cNvPr id="56" name="Text 54"/>
+          <p:cNvSpPr txBox="1"/>
+          <p:nvPr/>
+        </p:nvSpPr>
+        <p:spPr>
+          <a:xfrm>
+            <a:off x="685800" y="5760720"/>
+            <a:ext cx="10817352" cy="457200"/>
+          </a:xfrm>
+          <a:prstGeom prst="rect">
+            <a:avLst/>
+          </a:prstGeom>
+          <a:noFill/>
+          <a:ln/>
+        </p:spPr>
+        <p:txBody>
+          <a:bodyPr wrap="square" lIns="0" tIns="0" rIns="0" bIns="0" rtlCol="0" anchor="ctr"/>
+          <a:lstStyle/>
+          <a:p>
+            <a:pPr indent="0" marL="0">
+              <a:buNone/>
+            </a:pPr>
+            <a:r>
+              <a:rPr lang="en-US" sz="1100" b="1" dirty="0">
+                <a:solidFill>
+                  <a:srgbClr val="1F4E79"/>
+                </a:solidFill>
+                <a:latin typeface="Calibri" pitchFamily="34" charset="0"/>
+                <a:ea typeface="Calibri" pitchFamily="34" charset="-122"/>
+                <a:cs typeface="Calibri" pitchFamily="34" charset="-120"/>
+              </a:rPr>
+              <a:t>Total, peak per function   </a:t>
+            </a:r>
+            <a:pPr indent="0" marL="0">
+              <a:buNone/>
+            </a:pPr>
+            <a:r>
+              <a:rPr lang="en-US" sz="1400" b="1" dirty="0">
+                <a:solidFill>
+                  <a:srgbClr val="0070C0"/>
+                </a:solidFill>
+                <a:latin typeface="Calibri" pitchFamily="34" charset="0"/>
+                <a:ea typeface="Calibri" pitchFamily="34" charset="-122"/>
+                <a:cs typeface="Calibri" pitchFamily="34" charset="-120"/>
+              </a:rPr>
+              <a:t>111 people</a:t>
+            </a:r>
+            <a:pPr indent="0" marL="0">
+              <a:buNone/>
+            </a:pPr>
+            <a:r>
+              <a:rPr lang="en-US" sz="1100" dirty="0">
+                <a:solidFill>
+                  <a:srgbClr val="1D1D1A"/>
+                </a:solidFill>
+                <a:latin typeface="Calibri" pitchFamily="34" charset="0"/>
+                <a:ea typeface="Calibri" pitchFamily="34" charset="-122"/>
+                <a:cs typeface="Calibri" pitchFamily="34" charset="-120"/>
+              </a:rPr>
+              <a:t>     across 8 teams and 19 roles; the roles are profiled on the next page.</a:t>
+            </a:r>
+            <a:endParaRPr lang="en-US" sz="1100" dirty="0"/>
+          </a:p>
+        </p:txBody>
+      </p:sp>
+    </p:spTree>
+  </p:cSld>
+  <p:clrMapOvr>
+    <a:masterClrMapping/>
+  </p:clrMapOvr>
+</p:sld>
+</file>
+
+<file path=ppt/slides/slide3.xml><?xml version="1.0" encoding="utf-8"?>
+<p:sld xmlns:a="http://schemas.openxmlformats.org/drawingml/2006/main" xmlns:r="http://schemas.openxmlformats.org/officeDocument/2006/relationships" xmlns:p="http://schemas.openxmlformats.org/presentationml/2006/main">
+  <p:cSld name="Slide 3">
+    <p:spTree>
+      <p:nvGrpSpPr>
+        <p:cNvPr id="1" name=""/>
+        <p:cNvGrpSpPr/>
+        <p:nvPr/>
+      </p:nvGrpSpPr>
+      <p:grpSpPr>
+        <a:xfrm>
+          <a:off x="0" y="0"/>
+          <a:ext cx="0" cy="0"/>
+          <a:chOff x="0" y="0"/>
+          <a:chExt cx="0" cy="0"/>
+        </a:xfrm>
+      </p:grpSpPr>
+      <p:sp>
+        <p:nvSpPr>
+          <p:cNvPr id="2" name="Text 0"/>
+          <p:cNvSpPr txBox="1"/>
+          <p:nvPr/>
+        </p:nvSpPr>
+        <p:spPr>
+          <a:xfrm>
+            <a:off x="475488" y="146304"/>
+            <a:ext cx="11247120" cy="457200"/>
+          </a:xfrm>
+          <a:prstGeom prst="rect">
+            <a:avLst/>
+          </a:prstGeom>
+          <a:noFill/>
+          <a:ln/>
+        </p:spPr>
+        <p:txBody>
+          <a:bodyPr wrap="square" lIns="0" tIns="0" rIns="0" bIns="0" rtlCol="0" anchor="ctr"/>
+          <a:lstStyle/>
+          <a:p>
+            <a:pPr indent="0" marL="0">
+              <a:buNone/>
+            </a:pPr>
+            <a:r>
+              <a:rPr lang="en-US" sz="1800" b="1" dirty="0">
+                <a:solidFill>
+                  <a:srgbClr val="C00000"/>
+                </a:solidFill>
+                <a:latin typeface="Calibri" pitchFamily="34" charset="0"/>
+                <a:ea typeface="Calibri" pitchFamily="34" charset="-122"/>
+                <a:cs typeface="Calibri" pitchFamily="34" charset="-120"/>
+              </a:rPr>
+              <a:t>Role profiles: 19 roles, how each works with iFLYTEK, and how many people</a:t>
+            </a:r>
+            <a:endParaRPr lang="en-US" sz="1800" dirty="0"/>
+          </a:p>
+        </p:txBody>
+      </p:sp>
+      <p:sp>
+        <p:nvSpPr>
+          <p:cNvPr id="3" name="Text 1"/>
+          <p:cNvSpPr txBox="1"/>
+          <p:nvPr/>
+        </p:nvSpPr>
+        <p:spPr>
+          <a:xfrm>
+            <a:off x="457200" y="640080"/>
+            <a:ext cx="11274552" cy="365760"/>
+          </a:xfrm>
+          <a:prstGeom prst="rect">
+            <a:avLst/>
+          </a:prstGeom>
+          <a:noFill/>
+          <a:ln/>
+        </p:spPr>
+        <p:txBody>
+          <a:bodyPr wrap="square" lIns="0" tIns="0" rIns="0" bIns="0" rtlCol="0" anchor="t"/>
+          <a:lstStyle/>
+          <a:p>
+            <a:pPr indent="0" marL="0">
+              <a:buNone/>
+            </a:pPr>
+            <a:r>
+              <a:rPr lang="en-US" sz="1050" dirty="0">
+                <a:solidFill>
+                  <a:srgbClr val="1D1D1A"/>
+                </a:solidFill>
+                <a:latin typeface="Calibri" pitchFamily="34" charset="0"/>
+                <a:ea typeface="Calibri" pitchFamily="34" charset="-122"/>
+                <a:cs typeface="Calibri" pitchFamily="34" charset="-120"/>
+              </a:rPr>
+              <a:t>Role composition from Appendix A7; joint work from Appendices A10 and A3. Headcounts are peaks per function.</a:t>
+            </a:r>
+            <a:endParaRPr lang="en-US" sz="1050" dirty="0"/>
+          </a:p>
+        </p:txBody>
+      </p:sp>
       <p:graphicFrame>
         <p:nvGraphicFramePr>
-          <p:cNvPr id="3" name="Table 0"/>
+          <p:cNvPr id="4" name="Table 0"/>
           <p:cNvGraphicFramePr>
             <a:graphicFrameLocks noGrp="1"/>
           </p:cNvGraphicFramePr>
@@ -1749,7 +3880,7 @@
                           <a:ea typeface="Calibri" pitchFamily="34" charset="-122"/>
                           <a:cs typeface="Calibri" pitchFamily="34" charset="-120"/>
                         </a:rPr>
-                        <a:t>Must be able to</a:t>
+                        <a:t>How the role works with iFLYTEK</a:t>
                       </a:r>
                       <a:endParaRPr lang="en-US" sz="900" dirty="0">
                         <a:latin typeface="Calibri" charset="0"/>
@@ -2038,7 +4169,7 @@
                           <a:ea typeface="Calibri" pitchFamily="34" charset="-122"/>
                           <a:cs typeface="Calibri" pitchFamily="34" charset="-120"/>
                         </a:rPr>
-                        <a:t>Run the five-step schedule with iFLYTEK and Huawei; manage resources, risks and delivery; organise acceptance</a:t>
+                        <a:t>Runs the joint schedule with iFLYTEK's project team; aligns milestones, resources and acceptance at each of the five steps</a:t>
                       </a:r>
                       <a:endParaRPr lang="en-US" sz="850" dirty="0">
                         <a:latin typeface="Calibri" charset="0"/>
@@ -2238,7 +4369,7 @@
                           <a:ea typeface="Calibri" pitchFamily="34" charset="-122"/>
                           <a:cs typeface="Calibri" pitchFamily="34" charset="-120"/>
                         </a:rPr>
-                        <a:t>Define the National AI Application with iFLYTEK: functions, user scope, content rules, Brazilian content, roadmap</a:t>
+                        <a:t>Defines the National AI Application with iFLYTEK's product team: functions, user scope, content rules, Brazilian content, roadmap</a:t>
                       </a:r>
                       <a:endParaRPr lang="en-US" sz="850" dirty="0">
                         <a:latin typeface="Calibri" charset="0"/>
@@ -2438,7 +4569,7 @@
                           <a:ea typeface="Calibri" pitchFamily="34" charset="-122"/>
                           <a:cs typeface="Calibri" pitchFamily="34" charset="-120"/>
                         </a:rPr>
-                        <a:t>Coordinate Huawei compute, facilities, network and base environment; track T0 and the compute batches</a:t>
+                        <a:t>Coordinates Huawei compute and environment readiness with iFLYTEK's deployment team; tracks T0 and the compute batches</a:t>
                       </a:r>
                       <a:endParaRPr lang="en-US" sz="850" dirty="0">
                         <a:latin typeface="Calibri" charset="0"/>
@@ -2724,7 +4855,7 @@
                           <a:ea typeface="Calibri" pitchFamily="34" charset="-122"/>
                           <a:cs typeface="Calibri" pitchFamily="34" charset="-120"/>
                         </a:rPr>
-                        <a:t>Identify data sources, secure licences and permitted use, organise acquisition; keep data in RNP's Brazilian environment</a:t>
+                        <a:t>Sources and licenses Portuguese data to iFLYTEK's corpus specifications; agrees sources and permitted use with iFLYTEK</a:t>
                       </a:r>
                       <a:endParaRPr lang="en-US" sz="850" dirty="0">
                         <a:latin typeface="Calibri" charset="0"/>
@@ -2924,7 +5055,7 @@
                           <a:ea typeface="Calibri" pitchFamily="34" charset="-122"/>
                           <a:cs typeface="Calibri" pitchFamily="34" charset="-120"/>
                         </a:rPr>
-                        <a:t>Apply the agreed sampling, quality-threshold and re-check rules; run the pilot batch; operate the Corpus Construction Center</a:t>
+                        <a:t>Runs the pilot batch and full-volume production on the Corpus Construction Center with iFLYTEK's sampling checks and guidance</a:t>
                       </a:r>
                       <a:endParaRPr lang="en-US" sz="850" dirty="0">
                         <a:latin typeface="Calibri" charset="0"/>
@@ -3124,7 +5255,7 @@
                           <a:ea typeface="Calibri" pitchFamily="34" charset="-122"/>
                           <a:cs typeface="Calibri" pitchFamily="34" charset="-120"/>
                         </a:rPr>
-                        <a:t>Annotate to the agreed standards: 200,000 supervised and 20,000 safety samples; transcribe 10,000 hours of speech</a:t>
+                        <a:t>Annotates supervised, safety and speech data to standards agreed with iFLYTEK; iFLYTEK checks samples and feeds back</a:t>
                       </a:r>
                       <a:endParaRPr lang="en-US" sz="850" dirty="0">
                         <a:latin typeface="Calibri" charset="0"/>
@@ -3410,7 +5541,7 @@
                           <a:ea typeface="Calibri" pitchFamily="34" charset="-122"/>
                           <a:cs typeface="Calibri" pitchFamily="34" charset="-120"/>
                         </a:rPr>
-                        <a:t>Set Brazilian Portuguese quality, annotation, safety-label and speech (ASR/TTS) standards; analyse samples with iFLYTEK</a:t>
+                        <a:t>Sets Brazilian Portuguese quality, annotation, safety-label and speech standards with iFLYTEK; confirms rules on samples</a:t>
                       </a:r>
                       <a:endParaRPr lang="en-US" sz="850" dirty="0">
                         <a:latin typeface="Calibri" charset="0"/>
@@ -3696,7 +5827,7 @@
                           <a:ea typeface="Calibri" pitchFamily="34" charset="-122"/>
                           <a:cs typeface="Calibri" pitchFamily="34" charset="-120"/>
                         </a:rPr>
-                        <a:t>Define review policies, sensitive lexicons and risk samples on the Content Safety Review Platform; review content</a:t>
+                        <a:t>Builds review policies, lexicons and risk samples on the Content Safety Review Platform with iFLYTEK's safety team</a:t>
                       </a:r>
                       <a:endParaRPr lang="en-US" sz="850" dirty="0">
                         <a:latin typeface="Calibri" charset="0"/>
@@ -3896,7 +6027,7 @@
                           <a:ea typeface="Calibri" pitchFamily="34" charset="-122"/>
                           <a:cs typeface="Calibri" pitchFamily="34" charset="-120"/>
                         </a:rPr>
-                        <a:t>Clear data licences and permitted use; legal compliance of corpus, models and application</a:t>
+                        <a:t>Clears data licences and permitted use with iFLYTEK's data team; reviews legal compliance of corpus, models and application</a:t>
                       </a:r>
                       <a:endParaRPr lang="en-US" sz="850" dirty="0">
                         <a:latin typeface="Calibri" charset="0"/>
@@ -4096,7 +6227,7 @@
                           <a:ea typeface="Calibri" pitchFamily="34" charset="-122"/>
                           <a:cs typeface="Calibri" pitchFamily="34" charset="-120"/>
                         </a:rPr>
-                        <a:t>Own the review process and its records; escalate and approve</a:t>
+                        <a:t>Owns the review process; agrees escalation and approval rules with iFLYTEK</a:t>
                       </a:r>
                       <a:endParaRPr lang="en-US" sz="850" dirty="0">
                         <a:latin typeface="Calibri" charset="0"/>
@@ -4382,7 +6513,7 @@
                           <a:ea typeface="Calibri" pitchFamily="34" charset="-122"/>
                           <a:cs typeface="Calibri" pitchFamily="34" charset="-120"/>
                         </a:rPr>
-                        <a:t>Define the business scenario for each of the three DLM services; confirm inputs and service acceptance</a:t>
+                        <a:t>Defines the scenario for each of the three DLM services with iFLYTEK's DLM advisors; confirms inputs and service acceptance</a:t>
                       </a:r>
                       <a:endParaRPr lang="en-US" sz="850" dirty="0">
                         <a:latin typeface="Calibri" charset="0"/>
@@ -4582,7 +6713,7 @@
                           <a:ea typeface="Calibri" pitchFamily="34" charset="-122"/>
                           <a:cs typeface="Calibri" pitchFamily="34" charset="-120"/>
                         </a:rPr>
-                        <a:t>Specify domain data and expected results; read evaluation reports; set content boundaries</a:t>
+                        <a:t>Specifies domain data and expected results; reviews evaluation reports with iFLYTEK and sets content boundaries</a:t>
                       </a:r>
                       <a:endParaRPr lang="en-US" sz="850" dirty="0">
                         <a:latin typeface="Calibri" charset="0"/>
@@ -4782,7 +6913,7 @@
                           <a:ea typeface="Calibri" pitchFamily="34" charset="-122"/>
                           <a:cs typeface="Calibri" pitchFamily="34" charset="-120"/>
                         </a:rPr>
-                        <a:t>Assess model results in the domain; take part in evaluation exercises with iFLYTEK</a:t>
+                        <a:t>Assesses DLM results in the domain in joint evaluation exercises with iFLYTEK</a:t>
                       </a:r>
                       <a:endParaRPr lang="en-US" sz="850" dirty="0">
                         <a:latin typeface="Calibri" charset="0"/>
@@ -5068,7 +7199,7 @@
                           <a:ea typeface="Calibri" pitchFamily="34" charset="-122"/>
                           <a:cs typeface="Calibri" pitchFamily="34" charset="-120"/>
                         </a:rPr>
-                        <a:t>Prepare datasets, run training jobs, read logs and evaluations, release models; train the DLMs with iFLYTEK advising</a:t>
+                        <a:t>Trains and evaluates models on the Model Training Center with iFLYTEK's engineers; then trains the DLMs with iFLYTEK advising</a:t>
                       </a:r>
                       <a:endParaRPr lang="en-US" sz="850" dirty="0">
                         <a:latin typeface="Calibri" charset="0"/>
@@ -5268,7 +7399,7 @@
                           <a:ea typeface="Calibri" pitchFamily="34" charset="-122"/>
                           <a:cs typeface="Calibri" pitchFamily="34" charset="-120"/>
                         </a:rPr>
-                        <a:t>Run model evaluation and technical validation against the agreed rules; document results for acceptance</a:t>
+                        <a:t>Runs evaluation and validation against the rules agreed with iFLYTEK; documents results for acceptance</a:t>
                       </a:r>
                       <a:endParaRPr lang="en-US" sz="850" dirty="0">
                         <a:latin typeface="Calibri" charset="0"/>
@@ -5554,7 +7685,7 @@
                           <a:ea typeface="Calibri" pitchFamily="34" charset="-122"/>
                           <a:cs typeface="Calibri" pitchFamily="34" charset="-120"/>
                         </a:rPr>
-                        <a:t>Integrate the app (mobile, desktop, web) with RNP systems; build Brazilian content and features on the baseline; use the APIs</a:t>
+                        <a:t>Integrates the National AI Application with RNP systems; builds Brazilian content and features with iFLYTEK's app team</a:t>
                       </a:r>
                       <a:endParaRPr lang="en-US" sz="850" dirty="0">
                         <a:latin typeface="Calibri" charset="0"/>
@@ -5754,7 +7885,7 @@
                           <a:ea typeface="Calibri" pitchFamily="34" charset="-122"/>
                           <a:cs typeface="Calibri" pitchFamily="34" charset="-120"/>
                         </a:rPr>
-                        <a:t>Operate the application: configuration, user approval and permissions, API credentials and limits, usage analytics</a:t>
+                        <a:t>Takes over application operations from iFLYTEK: configuration, user approval, API credentials and limits, usage analytics</a:t>
                       </a:r>
                       <a:endParaRPr lang="en-US" sz="850" dirty="0">
                         <a:latin typeface="Calibri" charset="0"/>
@@ -5954,7 +8085,7 @@
                           <a:ea typeface="Calibri" pitchFamily="34" charset="-122"/>
                           <a:cs typeface="Calibri" pitchFamily="34" charset="-120"/>
                         </a:rPr>
-                        <a:t>Own application architecture and its integration with RNP systems and the platform</a:t>
+                        <a:t>Agrees application architecture and integration points with iFLYTEK's architects</a:t>
                       </a:r>
                       <a:endParaRPr lang="en-US" sz="850" dirty="0">
                         <a:latin typeface="Calibri" charset="0"/>
@@ -6240,7 +8371,7 @@
                           <a:ea typeface="Calibri" pitchFamily="34" charset="-122"/>
                           <a:cs typeface="Calibri" pitchFamily="34" charset="-120"/>
                         </a:rPr>
-                        <a:t>Monitor platform and cluster; handle incidents, changes, faults, deployments and escalation; run the platform after handover</a:t>
+                        <a:t>Runs the platform with iFLYTEK during 12 months of assisted O&amp;M, then independently: monitoring, incidents, changes, escalation</a:t>
                       </a:r>
                       <a:endParaRPr lang="en-US" sz="850" dirty="0">
                         <a:latin typeface="Calibri" charset="0"/>
